--- a/Lesson_7/Acondicionamiento_Señales.pptx
+++ b/Lesson_7/Acondicionamiento_Señales.pptx
@@ -250,21 +250,12 @@
 </p:presentation>
 </file>
 
-<file path=ppt/revisionInfo.xml><?xml version="1.0" encoding="utf-8"?>
-<p1510:revInfo xmlns:a="http://schemas.openxmlformats.org/drawingml/2006/main" xmlns:r="http://schemas.openxmlformats.org/officeDocument/2006/relationships" xmlns:p1510="http://schemas.microsoft.com/office/powerpoint/2015/10/main">
-  <p1510:revLst>
-    <p1510:client id="{63C7F291-40CF-034B-B1CC-CF05E0849024}" v="24" dt="2025-10-02T00:04:26.154"/>
-    <p1510:client id="{B39B29EF-C19F-42A5-A5F2-1CF21498A706}" v="66" dt="2025-10-01T15:53:59.565"/>
-  </p1510:revLst>
-</p1510:revInfo>
-</file>
-
 <file path=ppt/changesInfos/changesInfo1.xml><?xml version="1.0" encoding="utf-8"?>
 <pc:chgInfo xmlns:a="http://schemas.openxmlformats.org/drawingml/2006/main" xmlns:r="http://schemas.openxmlformats.org/officeDocument/2006/relationships" xmlns:ac="http://schemas.microsoft.com/office/drawing/2013/main/command" xmlns:pc="http://schemas.microsoft.com/office/powerpoint/2013/main/command">
   <pc:docChgLst>
     <pc:chgData name="JHEYSON FABIAN VILLAVISAN BUITRAGO" userId="e5ced5c2-d787-455d-b115-4f08a699b8c8" providerId="ADAL" clId="{D29F3602-5A42-550B-85C2-F2C884FDDEDE}"/>
     <pc:docChg chg="undo custSel addSld modSld sldOrd modSection">
-      <pc:chgData name="JHEYSON FABIAN VILLAVISAN BUITRAGO" userId="e5ced5c2-d787-455d-b115-4f08a699b8c8" providerId="ADAL" clId="{D29F3602-5A42-550B-85C2-F2C884FDDEDE}" dt="2025-10-02T00:06:08.849" v="334" actId="20577"/>
+      <pc:chgData name="JHEYSON FABIAN VILLAVISAN BUITRAGO" userId="e5ced5c2-d787-455d-b115-4f08a699b8c8" providerId="ADAL" clId="{D29F3602-5A42-550B-85C2-F2C884FDDEDE}" dt="2025-11-01T14:08:59.420" v="343" actId="20577"/>
       <pc:docMkLst>
         <pc:docMk/>
       </pc:docMkLst>
@@ -296,59 +287,19 @@
           <pc:docMk/>
           <pc:sldMk cId="2348889441" sldId="343"/>
         </pc:sldMkLst>
-        <pc:spChg chg="mod">
-          <ac:chgData name="JHEYSON FABIAN VILLAVISAN BUITRAGO" userId="e5ced5c2-d787-455d-b115-4f08a699b8c8" providerId="ADAL" clId="{D29F3602-5A42-550B-85C2-F2C884FDDEDE}" dt="2025-10-01T23:46:56.267" v="76" actId="1076"/>
-          <ac:spMkLst>
-            <pc:docMk/>
-            <pc:sldMk cId="2348889441" sldId="343"/>
-            <ac:spMk id="2" creationId="{1E41CD1B-A984-6067-6ACE-6BA8201FB1BD}"/>
-          </ac:spMkLst>
-        </pc:spChg>
-        <pc:spChg chg="mod">
-          <ac:chgData name="JHEYSON FABIAN VILLAVISAN BUITRAGO" userId="e5ced5c2-d787-455d-b115-4f08a699b8c8" providerId="ADAL" clId="{D29F3602-5A42-550B-85C2-F2C884FDDEDE}" dt="2025-10-01T23:47:42.246" v="98" actId="20577"/>
-          <ac:spMkLst>
-            <pc:docMk/>
-            <pc:sldMk cId="2348889441" sldId="343"/>
-            <ac:spMk id="4" creationId="{FE455CB8-90D2-6B9E-FFF1-20F7FDF6CAD5}"/>
-          </ac:spMkLst>
-        </pc:spChg>
-        <pc:spChg chg="mod">
-          <ac:chgData name="JHEYSON FABIAN VILLAVISAN BUITRAGO" userId="e5ced5c2-d787-455d-b115-4f08a699b8c8" providerId="ADAL" clId="{D29F3602-5A42-550B-85C2-F2C884FDDEDE}" dt="2025-10-01T23:46:20.666" v="3" actId="1076"/>
-          <ac:spMkLst>
-            <pc:docMk/>
-            <pc:sldMk cId="2348889441" sldId="343"/>
-            <ac:spMk id="9" creationId="{3A86AB69-362F-4601-CD9E-27E4E82F4DE0}"/>
-          </ac:spMkLst>
-        </pc:spChg>
-        <pc:picChg chg="mod">
-          <ac:chgData name="JHEYSON FABIAN VILLAVISAN BUITRAGO" userId="e5ced5c2-d787-455d-b115-4f08a699b8c8" providerId="ADAL" clId="{D29F3602-5A42-550B-85C2-F2C884FDDEDE}" dt="2025-10-01T23:47:46.154" v="99" actId="1076"/>
-          <ac:picMkLst>
-            <pc:docMk/>
-            <pc:sldMk cId="2348889441" sldId="343"/>
-            <ac:picMk id="6" creationId="{1180AE4D-8A67-8FB4-A3C5-AFED5F908123}"/>
-          </ac:picMkLst>
-        </pc:picChg>
-        <pc:picChg chg="mod">
-          <ac:chgData name="JHEYSON FABIAN VILLAVISAN BUITRAGO" userId="e5ced5c2-d787-455d-b115-4f08a699b8c8" providerId="ADAL" clId="{D29F3602-5A42-550B-85C2-F2C884FDDEDE}" dt="2025-10-01T23:47:48.130" v="100" actId="1076"/>
-          <ac:picMkLst>
-            <pc:docMk/>
-            <pc:sldMk cId="2348889441" sldId="343"/>
-            <ac:picMk id="8" creationId="{D521794C-74DE-BA28-9481-BA04D382D7B1}"/>
-          </ac:picMkLst>
-        </pc:picChg>
       </pc:sldChg>
       <pc:sldChg chg="modSp mod">
-        <pc:chgData name="JHEYSON FABIAN VILLAVISAN BUITRAGO" userId="e5ced5c2-d787-455d-b115-4f08a699b8c8" providerId="ADAL" clId="{D29F3602-5A42-550B-85C2-F2C884FDDEDE}" dt="2025-10-01T23:47:56.314" v="102" actId="20577"/>
+        <pc:chgData name="JHEYSON FABIAN VILLAVISAN BUITRAGO" userId="e5ced5c2-d787-455d-b115-4f08a699b8c8" providerId="ADAL" clId="{D29F3602-5A42-550B-85C2-F2C884FDDEDE}" dt="2025-11-01T14:08:59.420" v="343" actId="20577"/>
         <pc:sldMkLst>
           <pc:docMk/>
           <pc:sldMk cId="412528506" sldId="344"/>
         </pc:sldMkLst>
         <pc:spChg chg="mod">
-          <ac:chgData name="JHEYSON FABIAN VILLAVISAN BUITRAGO" userId="e5ced5c2-d787-455d-b115-4f08a699b8c8" providerId="ADAL" clId="{D29F3602-5A42-550B-85C2-F2C884FDDEDE}" dt="2025-10-01T23:47:56.314" v="102" actId="20577"/>
+          <ac:chgData name="JHEYSON FABIAN VILLAVISAN BUITRAGO" userId="e5ced5c2-d787-455d-b115-4f08a699b8c8" providerId="ADAL" clId="{D29F3602-5A42-550B-85C2-F2C884FDDEDE}" dt="2025-11-01T14:08:59.420" v="343" actId="20577"/>
           <ac:spMkLst>
             <pc:docMk/>
             <pc:sldMk cId="412528506" sldId="344"/>
-            <ac:spMk id="10" creationId="{E0CE885E-4457-B7F6-82A6-3DA1BA6C559D}"/>
+            <ac:spMk id="13" creationId="{3EED6585-7A0A-4DCD-9091-9FB99301A51B}"/>
           </ac:spMkLst>
         </pc:spChg>
       </pc:sldChg>
@@ -358,14 +309,6 @@
           <pc:docMk/>
           <pc:sldMk cId="3286888530" sldId="345"/>
         </pc:sldMkLst>
-        <pc:spChg chg="mod">
-          <ac:chgData name="JHEYSON FABIAN VILLAVISAN BUITRAGO" userId="e5ced5c2-d787-455d-b115-4f08a699b8c8" providerId="ADAL" clId="{D29F3602-5A42-550B-85C2-F2C884FDDEDE}" dt="2025-10-01T23:48:14.110" v="104" actId="20577"/>
-          <ac:spMkLst>
-            <pc:docMk/>
-            <pc:sldMk cId="3286888530" sldId="345"/>
-            <ac:spMk id="10" creationId="{487B9FC8-5BA5-D437-51F4-70648E7FFA64}"/>
-          </ac:spMkLst>
-        </pc:spChg>
       </pc:sldChg>
       <pc:sldChg chg="addSp delSp modSp add mod">
         <pc:chgData name="JHEYSON FABIAN VILLAVISAN BUITRAGO" userId="e5ced5c2-d787-455d-b115-4f08a699b8c8" providerId="ADAL" clId="{D29F3602-5A42-550B-85C2-F2C884FDDEDE}" dt="2025-10-01T23:50:42.110" v="125" actId="20577"/>
@@ -373,70 +316,6 @@
           <pc:docMk/>
           <pc:sldMk cId="3657797013" sldId="347"/>
         </pc:sldMkLst>
-        <pc:spChg chg="mod">
-          <ac:chgData name="JHEYSON FABIAN VILLAVISAN BUITRAGO" userId="e5ced5c2-d787-455d-b115-4f08a699b8c8" providerId="ADAL" clId="{D29F3602-5A42-550B-85C2-F2C884FDDEDE}" dt="2025-10-01T23:49:03.818" v="106"/>
-          <ac:spMkLst>
-            <pc:docMk/>
-            <pc:sldMk cId="3657797013" sldId="347"/>
-            <ac:spMk id="3" creationId="{F12CA28F-2156-1ACE-B4CE-8E6ED3244468}"/>
-          </ac:spMkLst>
-        </pc:spChg>
-        <pc:spChg chg="add del mod">
-          <ac:chgData name="JHEYSON FABIAN VILLAVISAN BUITRAGO" userId="e5ced5c2-d787-455d-b115-4f08a699b8c8" providerId="ADAL" clId="{D29F3602-5A42-550B-85C2-F2C884FDDEDE}" dt="2025-10-01T23:50:23.333" v="118" actId="478"/>
-          <ac:spMkLst>
-            <pc:docMk/>
-            <pc:sldMk cId="3657797013" sldId="347"/>
-            <ac:spMk id="4" creationId="{B2D21024-318B-08F5-1B0E-B771C5E69DFD}"/>
-          </ac:spMkLst>
-        </pc:spChg>
-        <pc:spChg chg="add mod">
-          <ac:chgData name="JHEYSON FABIAN VILLAVISAN BUITRAGO" userId="e5ced5c2-d787-455d-b115-4f08a699b8c8" providerId="ADAL" clId="{D29F3602-5A42-550B-85C2-F2C884FDDEDE}" dt="2025-10-01T23:49:41.339" v="110"/>
-          <ac:spMkLst>
-            <pc:docMk/>
-            <pc:sldMk cId="3657797013" sldId="347"/>
-            <ac:spMk id="6" creationId="{BD213EC8-BB4D-B7FD-B39D-5287E6AEF05B}"/>
-          </ac:spMkLst>
-        </pc:spChg>
-        <pc:spChg chg="add mod">
-          <ac:chgData name="JHEYSON FABIAN VILLAVISAN BUITRAGO" userId="e5ced5c2-d787-455d-b115-4f08a699b8c8" providerId="ADAL" clId="{D29F3602-5A42-550B-85C2-F2C884FDDEDE}" dt="2025-10-01T23:50:13.580" v="116"/>
-          <ac:spMkLst>
-            <pc:docMk/>
-            <pc:sldMk cId="3657797013" sldId="347"/>
-            <ac:spMk id="7" creationId="{5BF9D110-D40A-2D21-2E10-FDECBE686379}"/>
-          </ac:spMkLst>
-        </pc:spChg>
-        <pc:spChg chg="add mod">
-          <ac:chgData name="JHEYSON FABIAN VILLAVISAN BUITRAGO" userId="e5ced5c2-d787-455d-b115-4f08a699b8c8" providerId="ADAL" clId="{D29F3602-5A42-550B-85C2-F2C884FDDEDE}" dt="2025-10-01T23:50:13.035" v="115"/>
-          <ac:spMkLst>
-            <pc:docMk/>
-            <pc:sldMk cId="3657797013" sldId="347"/>
-            <ac:spMk id="8" creationId="{C724AFF3-B9C7-F107-3A81-883139CE52EB}"/>
-          </ac:spMkLst>
-        </pc:spChg>
-        <pc:spChg chg="mod">
-          <ac:chgData name="JHEYSON FABIAN VILLAVISAN BUITRAGO" userId="e5ced5c2-d787-455d-b115-4f08a699b8c8" providerId="ADAL" clId="{D29F3602-5A42-550B-85C2-F2C884FDDEDE}" dt="2025-10-01T23:50:42.110" v="125" actId="20577"/>
-          <ac:spMkLst>
-            <pc:docMk/>
-            <pc:sldMk cId="3657797013" sldId="347"/>
-            <ac:spMk id="10" creationId="{A0A38D5E-B739-DA42-5ADF-88F0424F5666}"/>
-          </ac:spMkLst>
-        </pc:spChg>
-        <pc:spChg chg="add del">
-          <ac:chgData name="JHEYSON FABIAN VILLAVISAN BUITRAGO" userId="e5ced5c2-d787-455d-b115-4f08a699b8c8" providerId="ADAL" clId="{D29F3602-5A42-550B-85C2-F2C884FDDEDE}" dt="2025-10-01T23:50:12.498" v="114" actId="22"/>
-          <ac:spMkLst>
-            <pc:docMk/>
-            <pc:sldMk cId="3657797013" sldId="347"/>
-            <ac:spMk id="11" creationId="{F6CA808A-0D08-8FDD-274B-F87F640F18B2}"/>
-          </ac:spMkLst>
-        </pc:spChg>
-        <pc:spChg chg="add mod">
-          <ac:chgData name="JHEYSON FABIAN VILLAVISAN BUITRAGO" userId="e5ced5c2-d787-455d-b115-4f08a699b8c8" providerId="ADAL" clId="{D29F3602-5A42-550B-85C2-F2C884FDDEDE}" dt="2025-10-01T23:50:38.837" v="123" actId="121"/>
-          <ac:spMkLst>
-            <pc:docMk/>
-            <pc:sldMk cId="3657797013" sldId="347"/>
-            <ac:spMk id="13" creationId="{4740BE0A-ECE2-E2A6-2934-3B1A8E3D37F3}"/>
-          </ac:spMkLst>
-        </pc:spChg>
       </pc:sldChg>
       <pc:sldChg chg="modSp add mod">
         <pc:chgData name="JHEYSON FABIAN VILLAVISAN BUITRAGO" userId="e5ced5c2-d787-455d-b115-4f08a699b8c8" providerId="ADAL" clId="{D29F3602-5A42-550B-85C2-F2C884FDDEDE}" dt="2025-10-02T00:02:21.443" v="172" actId="20577"/>
@@ -489,14 +368,6 @@
             <pc:docMk/>
             <pc:sldMk cId="3693841533" sldId="349"/>
             <ac:spMk id="10" creationId="{AB6D5014-7D31-5A70-9137-BB13DD196EA3}"/>
-          </ac:spMkLst>
-        </pc:spChg>
-        <pc:spChg chg="del">
-          <ac:chgData name="JHEYSON FABIAN VILLAVISAN BUITRAGO" userId="e5ced5c2-d787-455d-b115-4f08a699b8c8" providerId="ADAL" clId="{D29F3602-5A42-550B-85C2-F2C884FDDEDE}" dt="2025-10-02T00:03:43.271" v="184" actId="478"/>
-          <ac:spMkLst>
-            <pc:docMk/>
-            <pc:sldMk cId="3693841533" sldId="349"/>
-            <ac:spMk id="13" creationId="{12A06F9E-4FF5-F171-D374-338002276994}"/>
           </ac:spMkLst>
         </pc:spChg>
       </pc:sldChg>
@@ -1277,14 +1148,6 @@
           <pc:docMk/>
           <pc:sldMk cId="616220982" sldId="275"/>
         </pc:sldMkLst>
-        <pc:spChg chg="mod">
-          <ac:chgData name="JHEYSON FABIAN VILLAVISAN BUITRAGO" userId="e5ced5c2-d787-455d-b115-4f08a699b8c8" providerId="ADAL" clId="{346ECE53-D0EE-4664-97A2-EE5ED4BD15CE}" dt="2025-09-13T05:12:42.747" v="3855" actId="20577"/>
-          <ac:spMkLst>
-            <pc:docMk/>
-            <pc:sldMk cId="616220982" sldId="275"/>
-            <ac:spMk id="2" creationId="{FB1B6180-BCA0-4F51-9F68-9E5BAB8A4FDC}"/>
-          </ac:spMkLst>
-        </pc:spChg>
       </pc:sldChg>
       <pc:sldChg chg="del">
         <pc:chgData name="JHEYSON FABIAN VILLAVISAN BUITRAGO" userId="e5ced5c2-d787-455d-b115-4f08a699b8c8" providerId="ADAL" clId="{346ECE53-D0EE-4664-97A2-EE5ED4BD15CE}" dt="2025-09-12T14:39:17.290" v="15" actId="47"/>
@@ -1628,22 +1491,6 @@
           <pc:docMk/>
           <pc:sldMk cId="3882822646" sldId="304"/>
         </pc:sldMkLst>
-        <pc:spChg chg="mod">
-          <ac:chgData name="JHEYSON FABIAN VILLAVISAN BUITRAGO" userId="e5ced5c2-d787-455d-b115-4f08a699b8c8" providerId="ADAL" clId="{346ECE53-D0EE-4664-97A2-EE5ED4BD15CE}" dt="2025-09-13T05:09:48.743" v="3807" actId="1076"/>
-          <ac:spMkLst>
-            <pc:docMk/>
-            <pc:sldMk cId="3882822646" sldId="304"/>
-            <ac:spMk id="4" creationId="{39F124C8-098C-669F-4BB4-6CFDB379D9C3}"/>
-          </ac:spMkLst>
-        </pc:spChg>
-        <pc:spChg chg="mod">
-          <ac:chgData name="JHEYSON FABIAN VILLAVISAN BUITRAGO" userId="e5ced5c2-d787-455d-b115-4f08a699b8c8" providerId="ADAL" clId="{346ECE53-D0EE-4664-97A2-EE5ED4BD15CE}" dt="2025-10-01T13:48:38.283" v="9006" actId="20577"/>
-          <ac:spMkLst>
-            <pc:docMk/>
-            <pc:sldMk cId="3882822646" sldId="304"/>
-            <ac:spMk id="10" creationId="{25C0BFCC-1297-9A5E-A3A6-9E982ED1E620}"/>
-          </ac:spMkLst>
-        </pc:spChg>
       </pc:sldChg>
       <pc:sldChg chg="addSp modSp add mod">
         <pc:chgData name="JHEYSON FABIAN VILLAVISAN BUITRAGO" userId="e5ced5c2-d787-455d-b115-4f08a699b8c8" providerId="ADAL" clId="{346ECE53-D0EE-4664-97A2-EE5ED4BD15CE}" dt="2025-09-13T05:15:29.983" v="4274" actId="1076"/>
@@ -1651,30 +1498,6 @@
           <pc:docMk/>
           <pc:sldMk cId="1297005593" sldId="305"/>
         </pc:sldMkLst>
-        <pc:spChg chg="mod">
-          <ac:chgData name="JHEYSON FABIAN VILLAVISAN BUITRAGO" userId="e5ced5c2-d787-455d-b115-4f08a699b8c8" providerId="ADAL" clId="{346ECE53-D0EE-4664-97A2-EE5ED4BD15CE}" dt="2025-09-13T05:13:19.317" v="3878" actId="1076"/>
-          <ac:spMkLst>
-            <pc:docMk/>
-            <pc:sldMk cId="1297005593" sldId="305"/>
-            <ac:spMk id="2" creationId="{68036ABB-4538-A1E0-9A60-F0D971D9F1A9}"/>
-          </ac:spMkLst>
-        </pc:spChg>
-        <pc:spChg chg="add mod">
-          <ac:chgData name="JHEYSON FABIAN VILLAVISAN BUITRAGO" userId="e5ced5c2-d787-455d-b115-4f08a699b8c8" providerId="ADAL" clId="{346ECE53-D0EE-4664-97A2-EE5ED4BD15CE}" dt="2025-09-13T05:15:29.983" v="4274" actId="1076"/>
-          <ac:spMkLst>
-            <pc:docMk/>
-            <pc:sldMk cId="1297005593" sldId="305"/>
-            <ac:spMk id="3" creationId="{989D4858-B99A-A0A6-854F-DEC18B7B38FB}"/>
-          </ac:spMkLst>
-        </pc:spChg>
-        <pc:spChg chg="mod">
-          <ac:chgData name="JHEYSON FABIAN VILLAVISAN BUITRAGO" userId="e5ced5c2-d787-455d-b115-4f08a699b8c8" providerId="ADAL" clId="{346ECE53-D0EE-4664-97A2-EE5ED4BD15CE}" dt="2025-09-13T05:12:51.744" v="3859" actId="20577"/>
-          <ac:spMkLst>
-            <pc:docMk/>
-            <pc:sldMk cId="1297005593" sldId="305"/>
-            <ac:spMk id="10" creationId="{E7AD6A9A-AB6A-819D-0479-2D9673E6C2DC}"/>
-          </ac:spMkLst>
-        </pc:spChg>
       </pc:sldChg>
       <pc:sldChg chg="modSp add mod">
         <pc:chgData name="JHEYSON FABIAN VILLAVISAN BUITRAGO" userId="e5ced5c2-d787-455d-b115-4f08a699b8c8" providerId="ADAL" clId="{346ECE53-D0EE-4664-97A2-EE5ED4BD15CE}" dt="2025-09-13T05:18:29.509" v="4686" actId="20577"/>
@@ -1780,22 +1603,6 @@
           <pc:docMk/>
           <pc:sldMk cId="2968366527" sldId="323"/>
         </pc:sldMkLst>
-        <pc:picChg chg="add mod">
-          <ac:chgData name="JHEYSON FABIAN VILLAVISAN BUITRAGO" userId="e5ced5c2-d787-455d-b115-4f08a699b8c8" providerId="ADAL" clId="{346ECE53-D0EE-4664-97A2-EE5ED4BD15CE}" dt="2025-10-01T14:24:13.627" v="9059"/>
-          <ac:picMkLst>
-            <pc:docMk/>
-            <pc:sldMk cId="2968366527" sldId="323"/>
-            <ac:picMk id="3" creationId="{83944936-A37D-91C4-C794-62C6DAF47F27}"/>
-          </ac:picMkLst>
-        </pc:picChg>
-        <pc:picChg chg="add mod">
-          <ac:chgData name="JHEYSON FABIAN VILLAVISAN BUITRAGO" userId="e5ced5c2-d787-455d-b115-4f08a699b8c8" providerId="ADAL" clId="{346ECE53-D0EE-4664-97A2-EE5ED4BD15CE}" dt="2025-10-01T14:24:15.487" v="9060"/>
-          <ac:picMkLst>
-            <pc:docMk/>
-            <pc:sldMk cId="2968366527" sldId="323"/>
-            <ac:picMk id="4" creationId="{481F150D-1E5D-312B-0E58-9106C489F75E}"/>
-          </ac:picMkLst>
-        </pc:picChg>
       </pc:sldChg>
       <pc:sldChg chg="modSp mod">
         <pc:chgData name="JHEYSON FABIAN VILLAVISAN BUITRAGO" userId="e5ced5c2-d787-455d-b115-4f08a699b8c8" providerId="ADAL" clId="{346ECE53-D0EE-4664-97A2-EE5ED4BD15CE}" dt="2025-10-01T13:58:02.922" v="9032" actId="20577"/>
@@ -1803,14 +1610,6 @@
           <pc:docMk/>
           <pc:sldMk cId="3551420880" sldId="329"/>
         </pc:sldMkLst>
-        <pc:spChg chg="mod">
-          <ac:chgData name="JHEYSON FABIAN VILLAVISAN BUITRAGO" userId="e5ced5c2-d787-455d-b115-4f08a699b8c8" providerId="ADAL" clId="{346ECE53-D0EE-4664-97A2-EE5ED4BD15CE}" dt="2025-10-01T13:58:02.922" v="9032" actId="20577"/>
-          <ac:spMkLst>
-            <pc:docMk/>
-            <pc:sldMk cId="3551420880" sldId="329"/>
-            <ac:spMk id="3" creationId="{20C9391B-56F2-FD29-0653-3F5F62E21708}"/>
-          </ac:spMkLst>
-        </pc:spChg>
       </pc:sldChg>
       <pc:sldChg chg="addSp delSp modSp add mod">
         <pc:chgData name="JHEYSON FABIAN VILLAVISAN BUITRAGO" userId="e5ced5c2-d787-455d-b115-4f08a699b8c8" providerId="ADAL" clId="{346ECE53-D0EE-4664-97A2-EE5ED4BD15CE}" dt="2025-10-01T13:48:21.458" v="9003" actId="20577"/>
@@ -1818,46 +1617,6 @@
           <pc:docMk/>
           <pc:sldMk cId="2569677696" sldId="331"/>
         </pc:sldMkLst>
-        <pc:spChg chg="mod">
-          <ac:chgData name="JHEYSON FABIAN VILLAVISAN BUITRAGO" userId="e5ced5c2-d787-455d-b115-4f08a699b8c8" providerId="ADAL" clId="{346ECE53-D0EE-4664-97A2-EE5ED4BD15CE}" dt="2025-10-01T13:44:21.142" v="8949" actId="20577"/>
-          <ac:spMkLst>
-            <pc:docMk/>
-            <pc:sldMk cId="2569677696" sldId="331"/>
-            <ac:spMk id="2" creationId="{A30BF3F8-754F-3088-5240-E74D663CF697}"/>
-          </ac:spMkLst>
-        </pc:spChg>
-        <pc:spChg chg="add del mod">
-          <ac:chgData name="JHEYSON FABIAN VILLAVISAN BUITRAGO" userId="e5ced5c2-d787-455d-b115-4f08a699b8c8" providerId="ADAL" clId="{346ECE53-D0EE-4664-97A2-EE5ED4BD15CE}" dt="2025-10-01T13:48:12.986" v="9001" actId="20577"/>
-          <ac:spMkLst>
-            <pc:docMk/>
-            <pc:sldMk cId="2569677696" sldId="331"/>
-            <ac:spMk id="3" creationId="{CB1BEA24-20A7-AB39-FD35-B3139A7F28FA}"/>
-          </ac:spMkLst>
-        </pc:spChg>
-        <pc:spChg chg="del">
-          <ac:chgData name="JHEYSON FABIAN VILLAVISAN BUITRAGO" userId="e5ced5c2-d787-455d-b115-4f08a699b8c8" providerId="ADAL" clId="{346ECE53-D0EE-4664-97A2-EE5ED4BD15CE}" dt="2025-10-01T13:46:46.153" v="8952" actId="478"/>
-          <ac:spMkLst>
-            <pc:docMk/>
-            <pc:sldMk cId="2569677696" sldId="331"/>
-            <ac:spMk id="4" creationId="{ED021EE8-036C-D862-3C97-730D0BB1EAC0}"/>
-          </ac:spMkLst>
-        </pc:spChg>
-        <pc:spChg chg="mod">
-          <ac:chgData name="JHEYSON FABIAN VILLAVISAN BUITRAGO" userId="e5ced5c2-d787-455d-b115-4f08a699b8c8" providerId="ADAL" clId="{346ECE53-D0EE-4664-97A2-EE5ED4BD15CE}" dt="2025-10-01T13:48:21.458" v="9003" actId="20577"/>
-          <ac:spMkLst>
-            <pc:docMk/>
-            <pc:sldMk cId="2569677696" sldId="331"/>
-            <ac:spMk id="10" creationId="{16CB3820-9295-48C8-D9E6-37CA7CD8F876}"/>
-          </ac:spMkLst>
-        </pc:spChg>
-        <pc:picChg chg="add mod">
-          <ac:chgData name="JHEYSON FABIAN VILLAVISAN BUITRAGO" userId="e5ced5c2-d787-455d-b115-4f08a699b8c8" providerId="ADAL" clId="{346ECE53-D0EE-4664-97A2-EE5ED4BD15CE}" dt="2025-10-01T13:47:07.176" v="8960" actId="1076"/>
-          <ac:picMkLst>
-            <pc:docMk/>
-            <pc:sldMk cId="2569677696" sldId="331"/>
-            <ac:picMk id="7" creationId="{E02A1FE2-466D-81E1-B8BE-933C133C21CA}"/>
-          </ac:picMkLst>
-        </pc:picChg>
       </pc:sldChg>
       <pc:sldChg chg="delSp modSp add mod">
         <pc:chgData name="JHEYSON FABIAN VILLAVISAN BUITRAGO" userId="e5ced5c2-d787-455d-b115-4f08a699b8c8" providerId="ADAL" clId="{346ECE53-D0EE-4664-97A2-EE5ED4BD15CE}" dt="2025-10-01T14:22:37.504" v="9055" actId="478"/>
@@ -1865,38 +1624,6 @@
           <pc:docMk/>
           <pc:sldMk cId="2491249234" sldId="332"/>
         </pc:sldMkLst>
-        <pc:spChg chg="mod">
-          <ac:chgData name="JHEYSON FABIAN VILLAVISAN BUITRAGO" userId="e5ced5c2-d787-455d-b115-4f08a699b8c8" providerId="ADAL" clId="{346ECE53-D0EE-4664-97A2-EE5ED4BD15CE}" dt="2025-10-01T13:48:53.593" v="9029" actId="20577"/>
-          <ac:spMkLst>
-            <pc:docMk/>
-            <pc:sldMk cId="2491249234" sldId="332"/>
-            <ac:spMk id="2" creationId="{7A2E756C-D336-98BA-6963-D281F945AF3E}"/>
-          </ac:spMkLst>
-        </pc:spChg>
-        <pc:spChg chg="mod">
-          <ac:chgData name="JHEYSON FABIAN VILLAVISAN BUITRAGO" userId="e5ced5c2-d787-455d-b115-4f08a699b8c8" providerId="ADAL" clId="{346ECE53-D0EE-4664-97A2-EE5ED4BD15CE}" dt="2025-10-01T14:19:35.059" v="9033"/>
-          <ac:spMkLst>
-            <pc:docMk/>
-            <pc:sldMk cId="2491249234" sldId="332"/>
-            <ac:spMk id="3" creationId="{1357DE91-428F-FD66-EFDA-8598D1AE92C9}"/>
-          </ac:spMkLst>
-        </pc:spChg>
-        <pc:spChg chg="mod">
-          <ac:chgData name="JHEYSON FABIAN VILLAVISAN BUITRAGO" userId="e5ced5c2-d787-455d-b115-4f08a699b8c8" providerId="ADAL" clId="{346ECE53-D0EE-4664-97A2-EE5ED4BD15CE}" dt="2025-10-01T14:19:58.234" v="9035" actId="20577"/>
-          <ac:spMkLst>
-            <pc:docMk/>
-            <pc:sldMk cId="2491249234" sldId="332"/>
-            <ac:spMk id="10" creationId="{9A61FC14-D004-C0F1-AE70-2CA994C77D2F}"/>
-          </ac:spMkLst>
-        </pc:spChg>
-        <pc:picChg chg="del">
-          <ac:chgData name="JHEYSON FABIAN VILLAVISAN BUITRAGO" userId="e5ced5c2-d787-455d-b115-4f08a699b8c8" providerId="ADAL" clId="{346ECE53-D0EE-4664-97A2-EE5ED4BD15CE}" dt="2025-10-01T14:22:37.504" v="9055" actId="478"/>
-          <ac:picMkLst>
-            <pc:docMk/>
-            <pc:sldMk cId="2491249234" sldId="332"/>
-            <ac:picMk id="7" creationId="{4D211266-B1B9-B024-3A10-ED12AB89C88C}"/>
-          </ac:picMkLst>
-        </pc:picChg>
       </pc:sldChg>
       <pc:sldChg chg="addSp delSp modSp add mod">
         <pc:chgData name="JHEYSON FABIAN VILLAVISAN BUITRAGO" userId="e5ced5c2-d787-455d-b115-4f08a699b8c8" providerId="ADAL" clId="{346ECE53-D0EE-4664-97A2-EE5ED4BD15CE}" dt="2025-10-01T14:26:18.390" v="9072"/>
@@ -1904,54 +1631,6 @@
           <pc:docMk/>
           <pc:sldMk cId="2574269781" sldId="333"/>
         </pc:sldMkLst>
-        <pc:spChg chg="mod">
-          <ac:chgData name="JHEYSON FABIAN VILLAVISAN BUITRAGO" userId="e5ced5c2-d787-455d-b115-4f08a699b8c8" providerId="ADAL" clId="{346ECE53-D0EE-4664-97A2-EE5ED4BD15CE}" dt="2025-10-01T14:22:05.066" v="9037"/>
-          <ac:spMkLst>
-            <pc:docMk/>
-            <pc:sldMk cId="2574269781" sldId="333"/>
-            <ac:spMk id="2" creationId="{338ED381-971E-4978-C885-B01A52360683}"/>
-          </ac:spMkLst>
-        </pc:spChg>
-        <pc:spChg chg="mod">
-          <ac:chgData name="JHEYSON FABIAN VILLAVISAN BUITRAGO" userId="e5ced5c2-d787-455d-b115-4f08a699b8c8" providerId="ADAL" clId="{346ECE53-D0EE-4664-97A2-EE5ED4BD15CE}" dt="2025-10-01T14:24:06.590" v="9058" actId="113"/>
-          <ac:spMkLst>
-            <pc:docMk/>
-            <pc:sldMk cId="2574269781" sldId="333"/>
-            <ac:spMk id="3" creationId="{9E3BBDC8-5B4B-3B28-5313-ECCC95033E4E}"/>
-          </ac:spMkLst>
-        </pc:spChg>
-        <pc:spChg chg="add mod">
-          <ac:chgData name="JHEYSON FABIAN VILLAVISAN BUITRAGO" userId="e5ced5c2-d787-455d-b115-4f08a699b8c8" providerId="ADAL" clId="{346ECE53-D0EE-4664-97A2-EE5ED4BD15CE}" dt="2025-10-01T14:26:18.390" v="9072"/>
-          <ac:spMkLst>
-            <pc:docMk/>
-            <pc:sldMk cId="2574269781" sldId="333"/>
-            <ac:spMk id="6" creationId="{C2B21E6A-928C-3C02-8A92-82AB25340C7C}"/>
-          </ac:spMkLst>
-        </pc:spChg>
-        <pc:spChg chg="mod">
-          <ac:chgData name="JHEYSON FABIAN VILLAVISAN BUITRAGO" userId="e5ced5c2-d787-455d-b115-4f08a699b8c8" providerId="ADAL" clId="{346ECE53-D0EE-4664-97A2-EE5ED4BD15CE}" dt="2025-10-01T14:22:42.054" v="9057" actId="20577"/>
-          <ac:spMkLst>
-            <pc:docMk/>
-            <pc:sldMk cId="2574269781" sldId="333"/>
-            <ac:spMk id="10" creationId="{846DC467-F0E8-6F8C-288E-096DCBE87552}"/>
-          </ac:spMkLst>
-        </pc:spChg>
-        <pc:picChg chg="add del mod">
-          <ac:chgData name="JHEYSON FABIAN VILLAVISAN BUITRAGO" userId="e5ced5c2-d787-455d-b115-4f08a699b8c8" providerId="ADAL" clId="{346ECE53-D0EE-4664-97A2-EE5ED4BD15CE}" dt="2025-10-01T14:26:02.194" v="9068" actId="478"/>
-          <ac:picMkLst>
-            <pc:docMk/>
-            <pc:sldMk cId="2574269781" sldId="333"/>
-            <ac:picMk id="4" creationId="{E24353DD-84B5-16D4-EED5-693000213CEF}"/>
-          </ac:picMkLst>
-        </pc:picChg>
-        <pc:picChg chg="del">
-          <ac:chgData name="JHEYSON FABIAN VILLAVISAN BUITRAGO" userId="e5ced5c2-d787-455d-b115-4f08a699b8c8" providerId="ADAL" clId="{346ECE53-D0EE-4664-97A2-EE5ED4BD15CE}" dt="2025-10-01T14:22:36.450" v="9054" actId="478"/>
-          <ac:picMkLst>
-            <pc:docMk/>
-            <pc:sldMk cId="2574269781" sldId="333"/>
-            <ac:picMk id="7" creationId="{5F83C0CE-E9EB-3C16-EE39-60F9B02C1A37}"/>
-          </ac:picMkLst>
-        </pc:picChg>
       </pc:sldChg>
       <pc:sldChg chg="addSp delSp modSp add mod">
         <pc:chgData name="JHEYSON FABIAN VILLAVISAN BUITRAGO" userId="e5ced5c2-d787-455d-b115-4f08a699b8c8" providerId="ADAL" clId="{346ECE53-D0EE-4664-97A2-EE5ED4BD15CE}" dt="2025-10-01T14:27:09.674" v="9081"/>
@@ -1959,38 +1638,6 @@
           <pc:docMk/>
           <pc:sldMk cId="3931287277" sldId="334"/>
         </pc:sldMkLst>
-        <pc:spChg chg="mod">
-          <ac:chgData name="JHEYSON FABIAN VILLAVISAN BUITRAGO" userId="e5ced5c2-d787-455d-b115-4f08a699b8c8" providerId="ADAL" clId="{346ECE53-D0EE-4664-97A2-EE5ED4BD15CE}" dt="2025-10-01T14:26:48.796" v="9077" actId="20577"/>
-          <ac:spMkLst>
-            <pc:docMk/>
-            <pc:sldMk cId="3931287277" sldId="334"/>
-            <ac:spMk id="3" creationId="{2C94B320-F5DD-9A89-71B1-F5D269CCB21B}"/>
-          </ac:spMkLst>
-        </pc:spChg>
-        <pc:spChg chg="add mod">
-          <ac:chgData name="JHEYSON FABIAN VILLAVISAN BUITRAGO" userId="e5ced5c2-d787-455d-b115-4f08a699b8c8" providerId="ADAL" clId="{346ECE53-D0EE-4664-97A2-EE5ED4BD15CE}" dt="2025-10-01T14:27:09.674" v="9081"/>
-          <ac:spMkLst>
-            <pc:docMk/>
-            <pc:sldMk cId="3931287277" sldId="334"/>
-            <ac:spMk id="6" creationId="{8A482ED3-C0BA-7EE4-DD46-9D7E067DF783}"/>
-          </ac:spMkLst>
-        </pc:spChg>
-        <pc:spChg chg="mod">
-          <ac:chgData name="JHEYSON FABIAN VILLAVISAN BUITRAGO" userId="e5ced5c2-d787-455d-b115-4f08a699b8c8" providerId="ADAL" clId="{346ECE53-D0EE-4664-97A2-EE5ED4BD15CE}" dt="2025-10-01T14:25:00.508" v="9067" actId="20577"/>
-          <ac:spMkLst>
-            <pc:docMk/>
-            <pc:sldMk cId="3931287277" sldId="334"/>
-            <ac:spMk id="10" creationId="{9582611D-72F2-7F28-6AFA-DFB0770AF3EF}"/>
-          </ac:spMkLst>
-        </pc:spChg>
-        <pc:picChg chg="del">
-          <ac:chgData name="JHEYSON FABIAN VILLAVISAN BUITRAGO" userId="e5ced5c2-d787-455d-b115-4f08a699b8c8" providerId="ADAL" clId="{346ECE53-D0EE-4664-97A2-EE5ED4BD15CE}" dt="2025-10-01T14:24:57.401" v="9065" actId="478"/>
-          <ac:picMkLst>
-            <pc:docMk/>
-            <pc:sldMk cId="3931287277" sldId="334"/>
-            <ac:picMk id="4" creationId="{06B766F4-D636-4305-2872-970EBEC743A7}"/>
-          </ac:picMkLst>
-        </pc:picChg>
       </pc:sldChg>
       <pc:sldChg chg="delSp modSp add mod">
         <pc:chgData name="JHEYSON FABIAN VILLAVISAN BUITRAGO" userId="e5ced5c2-d787-455d-b115-4f08a699b8c8" providerId="ADAL" clId="{346ECE53-D0EE-4664-97A2-EE5ED4BD15CE}" dt="2025-10-01T14:36:26.726" v="9094" actId="20577"/>
@@ -1998,38 +1645,6 @@
           <pc:docMk/>
           <pc:sldMk cId="3329690454" sldId="335"/>
         </pc:sldMkLst>
-        <pc:spChg chg="mod">
-          <ac:chgData name="JHEYSON FABIAN VILLAVISAN BUITRAGO" userId="e5ced5c2-d787-455d-b115-4f08a699b8c8" providerId="ADAL" clId="{346ECE53-D0EE-4664-97A2-EE5ED4BD15CE}" dt="2025-10-01T14:27:57.706" v="9091" actId="20577"/>
-          <ac:spMkLst>
-            <pc:docMk/>
-            <pc:sldMk cId="3329690454" sldId="335"/>
-            <ac:spMk id="2" creationId="{5AC2AAB4-9EC0-F00B-1911-2D424B4F9CD8}"/>
-          </ac:spMkLst>
-        </pc:spChg>
-        <pc:spChg chg="mod">
-          <ac:chgData name="JHEYSON FABIAN VILLAVISAN BUITRAGO" userId="e5ced5c2-d787-455d-b115-4f08a699b8c8" providerId="ADAL" clId="{346ECE53-D0EE-4664-97A2-EE5ED4BD15CE}" dt="2025-10-01T14:27:54.219" v="9083"/>
-          <ac:spMkLst>
-            <pc:docMk/>
-            <pc:sldMk cId="3329690454" sldId="335"/>
-            <ac:spMk id="3" creationId="{C0C70511-0522-EAF9-E0C1-348DAD9B1CA0}"/>
-          </ac:spMkLst>
-        </pc:spChg>
-        <pc:spChg chg="del">
-          <ac:chgData name="JHEYSON FABIAN VILLAVISAN BUITRAGO" userId="e5ced5c2-d787-455d-b115-4f08a699b8c8" providerId="ADAL" clId="{346ECE53-D0EE-4664-97A2-EE5ED4BD15CE}" dt="2025-10-01T14:28:00.780" v="9092" actId="478"/>
-          <ac:spMkLst>
-            <pc:docMk/>
-            <pc:sldMk cId="3329690454" sldId="335"/>
-            <ac:spMk id="6" creationId="{CDE6AE0E-4107-BACC-85E3-97B912474F6D}"/>
-          </ac:spMkLst>
-        </pc:spChg>
-        <pc:spChg chg="mod">
-          <ac:chgData name="JHEYSON FABIAN VILLAVISAN BUITRAGO" userId="e5ced5c2-d787-455d-b115-4f08a699b8c8" providerId="ADAL" clId="{346ECE53-D0EE-4664-97A2-EE5ED4BD15CE}" dt="2025-10-01T14:36:26.726" v="9094" actId="20577"/>
-          <ac:spMkLst>
-            <pc:docMk/>
-            <pc:sldMk cId="3329690454" sldId="335"/>
-            <ac:spMk id="10" creationId="{D80C63D0-3BAB-6CEB-9812-EB660DBA24D1}"/>
-          </ac:spMkLst>
-        </pc:spChg>
       </pc:sldChg>
       <pc:sldChg chg="addSp modSp add mod">
         <pc:chgData name="JHEYSON FABIAN VILLAVISAN BUITRAGO" userId="e5ced5c2-d787-455d-b115-4f08a699b8c8" providerId="ADAL" clId="{346ECE53-D0EE-4664-97A2-EE5ED4BD15CE}" dt="2025-10-01T14:43:35.662" v="9144" actId="20577"/>
@@ -2037,46 +1652,6 @@
           <pc:docMk/>
           <pc:sldMk cId="4105244592" sldId="336"/>
         </pc:sldMkLst>
-        <pc:spChg chg="mod">
-          <ac:chgData name="JHEYSON FABIAN VILLAVISAN BUITRAGO" userId="e5ced5c2-d787-455d-b115-4f08a699b8c8" providerId="ADAL" clId="{346ECE53-D0EE-4664-97A2-EE5ED4BD15CE}" dt="2025-10-01T14:42:58.517" v="9130" actId="1035"/>
-          <ac:spMkLst>
-            <pc:docMk/>
-            <pc:sldMk cId="4105244592" sldId="336"/>
-            <ac:spMk id="3" creationId="{BD2D6600-79FA-5681-802C-A3544D4354BB}"/>
-          </ac:spMkLst>
-        </pc:spChg>
-        <pc:spChg chg="mod">
-          <ac:chgData name="JHEYSON FABIAN VILLAVISAN BUITRAGO" userId="e5ced5c2-d787-455d-b115-4f08a699b8c8" providerId="ADAL" clId="{346ECE53-D0EE-4664-97A2-EE5ED4BD15CE}" dt="2025-10-01T14:37:07.803" v="9097" actId="20577"/>
-          <ac:spMkLst>
-            <pc:docMk/>
-            <pc:sldMk cId="4105244592" sldId="336"/>
-            <ac:spMk id="10" creationId="{BA89245F-1B10-D0F9-D569-E45E036018DB}"/>
-          </ac:spMkLst>
-        </pc:spChg>
-        <pc:spChg chg="add mod">
-          <ac:chgData name="JHEYSON FABIAN VILLAVISAN BUITRAGO" userId="e5ced5c2-d787-455d-b115-4f08a699b8c8" providerId="ADAL" clId="{346ECE53-D0EE-4664-97A2-EE5ED4BD15CE}" dt="2025-10-01T14:43:35.662" v="9144" actId="20577"/>
-          <ac:spMkLst>
-            <pc:docMk/>
-            <pc:sldMk cId="4105244592" sldId="336"/>
-            <ac:spMk id="11" creationId="{8C5B7459-12C0-E942-B1D7-DEA9CD145611}"/>
-          </ac:spMkLst>
-        </pc:spChg>
-        <pc:picChg chg="add mod">
-          <ac:chgData name="JHEYSON FABIAN VILLAVISAN BUITRAGO" userId="e5ced5c2-d787-455d-b115-4f08a699b8c8" providerId="ADAL" clId="{346ECE53-D0EE-4664-97A2-EE5ED4BD15CE}" dt="2025-10-01T14:42:58.517" v="9130" actId="1035"/>
-          <ac:picMkLst>
-            <pc:docMk/>
-            <pc:sldMk cId="4105244592" sldId="336"/>
-            <ac:picMk id="6" creationId="{EEF362CC-4B02-EB65-AD5B-F5D9CD432E57}"/>
-          </ac:picMkLst>
-        </pc:picChg>
-        <pc:picChg chg="add mod">
-          <ac:chgData name="JHEYSON FABIAN VILLAVISAN BUITRAGO" userId="e5ced5c2-d787-455d-b115-4f08a699b8c8" providerId="ADAL" clId="{346ECE53-D0EE-4664-97A2-EE5ED4BD15CE}" dt="2025-10-01T14:42:58.517" v="9130" actId="1035"/>
-          <ac:picMkLst>
-            <pc:docMk/>
-            <pc:sldMk cId="4105244592" sldId="336"/>
-            <ac:picMk id="8" creationId="{F23011B1-7F67-6550-E995-46EFE5CCD2F7}"/>
-          </ac:picMkLst>
-        </pc:picChg>
       </pc:sldChg>
       <pc:sldChg chg="addSp delSp modSp add mod">
         <pc:chgData name="JHEYSON FABIAN VILLAVISAN BUITRAGO" userId="e5ced5c2-d787-455d-b115-4f08a699b8c8" providerId="ADAL" clId="{346ECE53-D0EE-4664-97A2-EE5ED4BD15CE}" dt="2025-10-01T14:47:32.105" v="9167" actId="113"/>
@@ -2084,62 +1659,6 @@
           <pc:docMk/>
           <pc:sldMk cId="3592022733" sldId="337"/>
         </pc:sldMkLst>
-        <pc:spChg chg="mod">
-          <ac:chgData name="JHEYSON FABIAN VILLAVISAN BUITRAGO" userId="e5ced5c2-d787-455d-b115-4f08a699b8c8" providerId="ADAL" clId="{346ECE53-D0EE-4664-97A2-EE5ED4BD15CE}" dt="2025-10-01T14:46:42.818" v="9152" actId="113"/>
-          <ac:spMkLst>
-            <pc:docMk/>
-            <pc:sldMk cId="3592022733" sldId="337"/>
-            <ac:spMk id="2" creationId="{03343284-9D0E-EA60-805A-95863F02C7B2}"/>
-          </ac:spMkLst>
-        </pc:spChg>
-        <pc:spChg chg="mod">
-          <ac:chgData name="JHEYSON FABIAN VILLAVISAN BUITRAGO" userId="e5ced5c2-d787-455d-b115-4f08a699b8c8" providerId="ADAL" clId="{346ECE53-D0EE-4664-97A2-EE5ED4BD15CE}" dt="2025-10-01T14:47:32.105" v="9167" actId="113"/>
-          <ac:spMkLst>
-            <pc:docMk/>
-            <pc:sldMk cId="3592022733" sldId="337"/>
-            <ac:spMk id="3" creationId="{54FAA21D-B34E-120D-CDAF-908A013ADEDD}"/>
-          </ac:spMkLst>
-        </pc:spChg>
-        <pc:spChg chg="add">
-          <ac:chgData name="JHEYSON FABIAN VILLAVISAN BUITRAGO" userId="e5ced5c2-d787-455d-b115-4f08a699b8c8" providerId="ADAL" clId="{346ECE53-D0EE-4664-97A2-EE5ED4BD15CE}" dt="2025-10-01T14:46:56.065" v="9155"/>
-          <ac:spMkLst>
-            <pc:docMk/>
-            <pc:sldMk cId="3592022733" sldId="337"/>
-            <ac:spMk id="4" creationId="{2611452C-3471-C311-1BCA-B6FF0D1B1498}"/>
-          </ac:spMkLst>
-        </pc:spChg>
-        <pc:spChg chg="mod">
-          <ac:chgData name="JHEYSON FABIAN VILLAVISAN BUITRAGO" userId="e5ced5c2-d787-455d-b115-4f08a699b8c8" providerId="ADAL" clId="{346ECE53-D0EE-4664-97A2-EE5ED4BD15CE}" dt="2025-10-01T14:44:17.958" v="9147" actId="20577"/>
-          <ac:spMkLst>
-            <pc:docMk/>
-            <pc:sldMk cId="3592022733" sldId="337"/>
-            <ac:spMk id="10" creationId="{31A740DE-232D-2743-84F3-95B4D76680B4}"/>
-          </ac:spMkLst>
-        </pc:spChg>
-        <pc:spChg chg="del">
-          <ac:chgData name="JHEYSON FABIAN VILLAVISAN BUITRAGO" userId="e5ced5c2-d787-455d-b115-4f08a699b8c8" providerId="ADAL" clId="{346ECE53-D0EE-4664-97A2-EE5ED4BD15CE}" dt="2025-10-01T14:46:25.775" v="9150" actId="478"/>
-          <ac:spMkLst>
-            <pc:docMk/>
-            <pc:sldMk cId="3592022733" sldId="337"/>
-            <ac:spMk id="11" creationId="{6CCBD77F-07E5-8B62-A8EA-8BFBAB8823E5}"/>
-          </ac:spMkLst>
-        </pc:spChg>
-        <pc:picChg chg="del">
-          <ac:chgData name="JHEYSON FABIAN VILLAVISAN BUITRAGO" userId="e5ced5c2-d787-455d-b115-4f08a699b8c8" providerId="ADAL" clId="{346ECE53-D0EE-4664-97A2-EE5ED4BD15CE}" dt="2025-10-01T14:46:23.932" v="9148" actId="478"/>
-          <ac:picMkLst>
-            <pc:docMk/>
-            <pc:sldMk cId="3592022733" sldId="337"/>
-            <ac:picMk id="6" creationId="{6B0E9E7C-0DB9-ADEB-3DDB-0FD5D8C48B75}"/>
-          </ac:picMkLst>
-        </pc:picChg>
-        <pc:picChg chg="del">
-          <ac:chgData name="JHEYSON FABIAN VILLAVISAN BUITRAGO" userId="e5ced5c2-d787-455d-b115-4f08a699b8c8" providerId="ADAL" clId="{346ECE53-D0EE-4664-97A2-EE5ED4BD15CE}" dt="2025-10-01T14:46:24.293" v="9149" actId="478"/>
-          <ac:picMkLst>
-            <pc:docMk/>
-            <pc:sldMk cId="3592022733" sldId="337"/>
-            <ac:picMk id="8" creationId="{F6000C61-B284-F41D-7E2E-8CD85B457529}"/>
-          </ac:picMkLst>
-        </pc:picChg>
       </pc:sldChg>
       <pc:sldChg chg="addSp delSp modSp add mod">
         <pc:chgData name="JHEYSON FABIAN VILLAVISAN BUITRAGO" userId="e5ced5c2-d787-455d-b115-4f08a699b8c8" providerId="ADAL" clId="{346ECE53-D0EE-4664-97A2-EE5ED4BD15CE}" dt="2025-10-01T15:22:42.673" v="9568" actId="20577"/>
@@ -2147,38 +1666,6 @@
           <pc:docMk/>
           <pc:sldMk cId="2975864581" sldId="338"/>
         </pc:sldMkLst>
-        <pc:spChg chg="mod">
-          <ac:chgData name="JHEYSON FABIAN VILLAVISAN BUITRAGO" userId="e5ced5c2-d787-455d-b115-4f08a699b8c8" providerId="ADAL" clId="{346ECE53-D0EE-4664-97A2-EE5ED4BD15CE}" dt="2025-10-01T14:49:49.730" v="9179" actId="20577"/>
-          <ac:spMkLst>
-            <pc:docMk/>
-            <pc:sldMk cId="2975864581" sldId="338"/>
-            <ac:spMk id="2" creationId="{C2083859-336A-F0A9-AB50-B0C34FC94B4E}"/>
-          </ac:spMkLst>
-        </pc:spChg>
-        <pc:spChg chg="del mod">
-          <ac:chgData name="JHEYSON FABIAN VILLAVISAN BUITRAGO" userId="e5ced5c2-d787-455d-b115-4f08a699b8c8" providerId="ADAL" clId="{346ECE53-D0EE-4664-97A2-EE5ED4BD15CE}" dt="2025-10-01T14:50:15.047" v="9184" actId="478"/>
-          <ac:spMkLst>
-            <pc:docMk/>
-            <pc:sldMk cId="2975864581" sldId="338"/>
-            <ac:spMk id="3" creationId="{A964E7C9-2ACA-98AD-C661-BCFF96AEDFEC}"/>
-          </ac:spMkLst>
-        </pc:spChg>
-        <pc:spChg chg="add mod">
-          <ac:chgData name="JHEYSON FABIAN VILLAVISAN BUITRAGO" userId="e5ced5c2-d787-455d-b115-4f08a699b8c8" providerId="ADAL" clId="{346ECE53-D0EE-4664-97A2-EE5ED4BD15CE}" dt="2025-10-01T15:22:42.673" v="9568" actId="20577"/>
-          <ac:spMkLst>
-            <pc:docMk/>
-            <pc:sldMk cId="2975864581" sldId="338"/>
-            <ac:spMk id="4" creationId="{14A596B6-418B-1B20-40E7-021F3BDDD477}"/>
-          </ac:spMkLst>
-        </pc:spChg>
-        <pc:spChg chg="mod">
-          <ac:chgData name="JHEYSON FABIAN VILLAVISAN BUITRAGO" userId="e5ced5c2-d787-455d-b115-4f08a699b8c8" providerId="ADAL" clId="{346ECE53-D0EE-4664-97A2-EE5ED4BD15CE}" dt="2025-10-01T14:49:46.353" v="9170" actId="20577"/>
-          <ac:spMkLst>
-            <pc:docMk/>
-            <pc:sldMk cId="2975864581" sldId="338"/>
-            <ac:spMk id="10" creationId="{27D7AF3D-A062-4E30-0D6D-EDC461471AE6}"/>
-          </ac:spMkLst>
-        </pc:spChg>
       </pc:sldChg>
       <pc:sldChg chg="addSp modSp add mod">
         <pc:chgData name="JHEYSON FABIAN VILLAVISAN BUITRAGO" userId="e5ced5c2-d787-455d-b115-4f08a699b8c8" providerId="ADAL" clId="{346ECE53-D0EE-4664-97A2-EE5ED4BD15CE}" dt="2025-10-01T15:22:38.719" v="9567" actId="20577"/>
@@ -2186,38 +1673,6 @@
           <pc:docMk/>
           <pc:sldMk cId="280758795" sldId="339"/>
         </pc:sldMkLst>
-        <pc:spChg chg="mod">
-          <ac:chgData name="JHEYSON FABIAN VILLAVISAN BUITRAGO" userId="e5ced5c2-d787-455d-b115-4f08a699b8c8" providerId="ADAL" clId="{346ECE53-D0EE-4664-97A2-EE5ED4BD15CE}" dt="2025-10-01T15:22:38.719" v="9567" actId="20577"/>
-          <ac:spMkLst>
-            <pc:docMk/>
-            <pc:sldMk cId="280758795" sldId="339"/>
-            <ac:spMk id="4" creationId="{3B87083E-80C4-0601-8452-93C5ECAC9446}"/>
-          </ac:spMkLst>
-        </pc:spChg>
-        <pc:spChg chg="mod">
-          <ac:chgData name="JHEYSON FABIAN VILLAVISAN BUITRAGO" userId="e5ced5c2-d787-455d-b115-4f08a699b8c8" providerId="ADAL" clId="{346ECE53-D0EE-4664-97A2-EE5ED4BD15CE}" dt="2025-10-01T14:54:00.241" v="9327" actId="20577"/>
-          <ac:spMkLst>
-            <pc:docMk/>
-            <pc:sldMk cId="280758795" sldId="339"/>
-            <ac:spMk id="10" creationId="{50C676BF-09D7-CC64-9369-E659D2986DCC}"/>
-          </ac:spMkLst>
-        </pc:spChg>
-        <pc:picChg chg="add mod">
-          <ac:chgData name="JHEYSON FABIAN VILLAVISAN BUITRAGO" userId="e5ced5c2-d787-455d-b115-4f08a699b8c8" providerId="ADAL" clId="{346ECE53-D0EE-4664-97A2-EE5ED4BD15CE}" dt="2025-10-01T14:54:56.118" v="9375" actId="1038"/>
-          <ac:picMkLst>
-            <pc:docMk/>
-            <pc:sldMk cId="280758795" sldId="339"/>
-            <ac:picMk id="6" creationId="{B8049936-0BD4-AFF1-2D8E-BBFE4D42809B}"/>
-          </ac:picMkLst>
-        </pc:picChg>
-        <pc:picChg chg="add mod">
-          <ac:chgData name="JHEYSON FABIAN VILLAVISAN BUITRAGO" userId="e5ced5c2-d787-455d-b115-4f08a699b8c8" providerId="ADAL" clId="{346ECE53-D0EE-4664-97A2-EE5ED4BD15CE}" dt="2025-10-01T14:54:46.268" v="9344" actId="14100"/>
-          <ac:picMkLst>
-            <pc:docMk/>
-            <pc:sldMk cId="280758795" sldId="339"/>
-            <ac:picMk id="8" creationId="{355B1406-18A8-795C-4C68-F9585C9CAC0F}"/>
-          </ac:picMkLst>
-        </pc:picChg>
       </pc:sldChg>
       <pc:sldChg chg="addSp modSp add mod ord">
         <pc:chgData name="JHEYSON FABIAN VILLAVISAN BUITRAGO" userId="e5ced5c2-d787-455d-b115-4f08a699b8c8" providerId="ADAL" clId="{346ECE53-D0EE-4664-97A2-EE5ED4BD15CE}" dt="2025-10-01T15:00:44.931" v="9461" actId="113"/>
@@ -2225,46 +1680,6 @@
           <pc:docMk/>
           <pc:sldMk cId="3589220816" sldId="340"/>
         </pc:sldMkLst>
-        <pc:spChg chg="mod">
-          <ac:chgData name="JHEYSON FABIAN VILLAVISAN BUITRAGO" userId="e5ced5c2-d787-455d-b115-4f08a699b8c8" providerId="ADAL" clId="{346ECE53-D0EE-4664-97A2-EE5ED4BD15CE}" dt="2025-10-01T14:58:27.074" v="9405" actId="113"/>
-          <ac:spMkLst>
-            <pc:docMk/>
-            <pc:sldMk cId="3589220816" sldId="340"/>
-            <ac:spMk id="2" creationId="{0A3600EE-1EC9-B8BC-EAA0-D852831AA785}"/>
-          </ac:spMkLst>
-        </pc:spChg>
-        <pc:spChg chg="add mod">
-          <ac:chgData name="JHEYSON FABIAN VILLAVISAN BUITRAGO" userId="e5ced5c2-d787-455d-b115-4f08a699b8c8" providerId="ADAL" clId="{346ECE53-D0EE-4664-97A2-EE5ED4BD15CE}" dt="2025-10-01T15:00:44.931" v="9461" actId="113"/>
-          <ac:spMkLst>
-            <pc:docMk/>
-            <pc:sldMk cId="3589220816" sldId="340"/>
-            <ac:spMk id="3" creationId="{C3D8F243-92B5-25A0-E7EE-FD1759FCCF54}"/>
-          </ac:spMkLst>
-        </pc:spChg>
-        <pc:spChg chg="mod">
-          <ac:chgData name="JHEYSON FABIAN VILLAVISAN BUITRAGO" userId="e5ced5c2-d787-455d-b115-4f08a699b8c8" providerId="ADAL" clId="{346ECE53-D0EE-4664-97A2-EE5ED4BD15CE}" dt="2025-10-01T14:58:44.276" v="9423" actId="20577"/>
-          <ac:spMkLst>
-            <pc:docMk/>
-            <pc:sldMk cId="3589220816" sldId="340"/>
-            <ac:spMk id="4" creationId="{A8988B6B-0E2C-4B95-7F82-10D5B49B3561}"/>
-          </ac:spMkLst>
-        </pc:spChg>
-        <pc:spChg chg="mod">
-          <ac:chgData name="JHEYSON FABIAN VILLAVISAN BUITRAGO" userId="e5ced5c2-d787-455d-b115-4f08a699b8c8" providerId="ADAL" clId="{346ECE53-D0EE-4664-97A2-EE5ED4BD15CE}" dt="2025-10-01T14:59:31.248" v="9433" actId="20577"/>
-          <ac:spMkLst>
-            <pc:docMk/>
-            <pc:sldMk cId="3589220816" sldId="340"/>
-            <ac:spMk id="10" creationId="{CDFA9E12-C9D4-7F8C-990C-73909979FE81}"/>
-          </ac:spMkLst>
-        </pc:spChg>
-        <pc:picChg chg="add mod">
-          <ac:chgData name="JHEYSON FABIAN VILLAVISAN BUITRAGO" userId="e5ced5c2-d787-455d-b115-4f08a699b8c8" providerId="ADAL" clId="{346ECE53-D0EE-4664-97A2-EE5ED4BD15CE}" dt="2025-10-01T15:00:17.028" v="9453" actId="1076"/>
-          <ac:picMkLst>
-            <pc:docMk/>
-            <pc:sldMk cId="3589220816" sldId="340"/>
-            <ac:picMk id="2050" creationId="{F5CB1AB0-8D83-EE5A-87FF-8F8038C2B9D7}"/>
-          </ac:picMkLst>
-        </pc:picChg>
       </pc:sldChg>
       <pc:sldChg chg="addSp delSp modSp add mod">
         <pc:chgData name="JHEYSON FABIAN VILLAVISAN BUITRAGO" userId="e5ced5c2-d787-455d-b115-4f08a699b8c8" providerId="ADAL" clId="{346ECE53-D0EE-4664-97A2-EE5ED4BD15CE}" dt="2025-10-01T15:24:56.140" v="9583"/>
@@ -2272,54 +1687,6 @@
           <pc:docMk/>
           <pc:sldMk cId="3181571609" sldId="341"/>
         </pc:sldMkLst>
-        <pc:spChg chg="add mod">
-          <ac:chgData name="JHEYSON FABIAN VILLAVISAN BUITRAGO" userId="e5ced5c2-d787-455d-b115-4f08a699b8c8" providerId="ADAL" clId="{346ECE53-D0EE-4664-97A2-EE5ED4BD15CE}" dt="2025-10-01T15:01:04.638" v="9464"/>
-          <ac:spMkLst>
-            <pc:docMk/>
-            <pc:sldMk cId="3181571609" sldId="341"/>
-            <ac:spMk id="3" creationId="{FFA5068C-8E4B-24DC-E317-57BDA3B34A6B}"/>
-          </ac:spMkLst>
-        </pc:spChg>
-        <pc:spChg chg="mod">
-          <ac:chgData name="JHEYSON FABIAN VILLAVISAN BUITRAGO" userId="e5ced5c2-d787-455d-b115-4f08a699b8c8" providerId="ADAL" clId="{346ECE53-D0EE-4664-97A2-EE5ED4BD15CE}" dt="2025-10-01T14:59:49.047" v="9446"/>
-          <ac:spMkLst>
-            <pc:docMk/>
-            <pc:sldMk cId="3181571609" sldId="341"/>
-            <ac:spMk id="4" creationId="{5444D6A7-4D58-4C4B-8D79-DFBD01E3929A}"/>
-          </ac:spMkLst>
-        </pc:spChg>
-        <pc:spChg chg="add mod">
-          <ac:chgData name="JHEYSON FABIAN VILLAVISAN BUITRAGO" userId="e5ced5c2-d787-455d-b115-4f08a699b8c8" providerId="ADAL" clId="{346ECE53-D0EE-4664-97A2-EE5ED4BD15CE}" dt="2025-10-01T15:24:56.140" v="9583"/>
-          <ac:spMkLst>
-            <pc:docMk/>
-            <pc:sldMk cId="3181571609" sldId="341"/>
-            <ac:spMk id="6" creationId="{B03E4F82-CAAE-D03A-A0C5-07D091E7EB96}"/>
-          </ac:spMkLst>
-        </pc:spChg>
-        <pc:spChg chg="mod">
-          <ac:chgData name="JHEYSON FABIAN VILLAVISAN BUITRAGO" userId="e5ced5c2-d787-455d-b115-4f08a699b8c8" providerId="ADAL" clId="{346ECE53-D0EE-4664-97A2-EE5ED4BD15CE}" dt="2025-10-01T15:01:36.228" v="9466" actId="20577"/>
-          <ac:spMkLst>
-            <pc:docMk/>
-            <pc:sldMk cId="3181571609" sldId="341"/>
-            <ac:spMk id="10" creationId="{D549492D-5EC2-5D3D-2F78-DDC8F82A6CE6}"/>
-          </ac:spMkLst>
-        </pc:spChg>
-        <pc:picChg chg="del">
-          <ac:chgData name="JHEYSON FABIAN VILLAVISAN BUITRAGO" userId="e5ced5c2-d787-455d-b115-4f08a699b8c8" providerId="ADAL" clId="{346ECE53-D0EE-4664-97A2-EE5ED4BD15CE}" dt="2025-10-01T15:00:01.672" v="9447" actId="478"/>
-          <ac:picMkLst>
-            <pc:docMk/>
-            <pc:sldMk cId="3181571609" sldId="341"/>
-            <ac:picMk id="2050" creationId="{18385E19-9D71-AB88-D54B-3986C83097C9}"/>
-          </ac:picMkLst>
-        </pc:picChg>
-        <pc:picChg chg="add mod">
-          <ac:chgData name="JHEYSON FABIAN VILLAVISAN BUITRAGO" userId="e5ced5c2-d787-455d-b115-4f08a699b8c8" providerId="ADAL" clId="{346ECE53-D0EE-4664-97A2-EE5ED4BD15CE}" dt="2025-10-01T15:00:51.483" v="9462" actId="1076"/>
-          <ac:picMkLst>
-            <pc:docMk/>
-            <pc:sldMk cId="3181571609" sldId="341"/>
-            <ac:picMk id="3074" creationId="{8A7F024C-65D3-5169-B8D6-9A8B4E7904BA}"/>
-          </ac:picMkLst>
-        </pc:picChg>
       </pc:sldChg>
       <pc:sldChg chg="addSp delSp modSp add mod">
         <pc:chgData name="JHEYSON FABIAN VILLAVISAN BUITRAGO" userId="e5ced5c2-d787-455d-b115-4f08a699b8c8" providerId="ADAL" clId="{346ECE53-D0EE-4664-97A2-EE5ED4BD15CE}" dt="2025-10-01T15:16:53.711" v="9479" actId="20577"/>
@@ -2327,54 +1694,6 @@
           <pc:docMk/>
           <pc:sldMk cId="1096996333" sldId="342"/>
         </pc:sldMkLst>
-        <pc:spChg chg="mod">
-          <ac:chgData name="JHEYSON FABIAN VILLAVISAN BUITRAGO" userId="e5ced5c2-d787-455d-b115-4f08a699b8c8" providerId="ADAL" clId="{346ECE53-D0EE-4664-97A2-EE5ED4BD15CE}" dt="2025-10-01T15:15:42.122" v="9469" actId="113"/>
-          <ac:spMkLst>
-            <pc:docMk/>
-            <pc:sldMk cId="1096996333" sldId="342"/>
-            <ac:spMk id="2" creationId="{6A1EAAEF-CCF7-37E3-D9C1-4F3FD53FBC71}"/>
-          </ac:spMkLst>
-        </pc:spChg>
-        <pc:spChg chg="del">
-          <ac:chgData name="JHEYSON FABIAN VILLAVISAN BUITRAGO" userId="e5ced5c2-d787-455d-b115-4f08a699b8c8" providerId="ADAL" clId="{346ECE53-D0EE-4664-97A2-EE5ED4BD15CE}" dt="2025-10-01T15:15:49.987" v="9472" actId="478"/>
-          <ac:spMkLst>
-            <pc:docMk/>
-            <pc:sldMk cId="1096996333" sldId="342"/>
-            <ac:spMk id="3" creationId="{970A7039-8CDD-519A-DB09-2EA0C9CC8F3D}"/>
-          </ac:spMkLst>
-        </pc:spChg>
-        <pc:spChg chg="mod">
-          <ac:chgData name="JHEYSON FABIAN VILLAVISAN BUITRAGO" userId="e5ced5c2-d787-455d-b115-4f08a699b8c8" providerId="ADAL" clId="{346ECE53-D0EE-4664-97A2-EE5ED4BD15CE}" dt="2025-10-01T15:15:46.606" v="9470"/>
-          <ac:spMkLst>
-            <pc:docMk/>
-            <pc:sldMk cId="1096996333" sldId="342"/>
-            <ac:spMk id="4" creationId="{BE2C3F97-F9AC-9524-AC83-17B2A96F68CF}"/>
-          </ac:spMkLst>
-        </pc:spChg>
-        <pc:spChg chg="mod">
-          <ac:chgData name="JHEYSON FABIAN VILLAVISAN BUITRAGO" userId="e5ced5c2-d787-455d-b115-4f08a699b8c8" providerId="ADAL" clId="{346ECE53-D0EE-4664-97A2-EE5ED4BD15CE}" dt="2025-10-01T15:16:53.711" v="9479" actId="20577"/>
-          <ac:spMkLst>
-            <pc:docMk/>
-            <pc:sldMk cId="1096996333" sldId="342"/>
-            <ac:spMk id="10" creationId="{516862BE-B340-8652-F98E-B775EC4BB779}"/>
-          </ac:spMkLst>
-        </pc:spChg>
-        <pc:picChg chg="del">
-          <ac:chgData name="JHEYSON FABIAN VILLAVISAN BUITRAGO" userId="e5ced5c2-d787-455d-b115-4f08a699b8c8" providerId="ADAL" clId="{346ECE53-D0EE-4664-97A2-EE5ED4BD15CE}" dt="2025-10-01T15:15:48.723" v="9471" actId="478"/>
-          <ac:picMkLst>
-            <pc:docMk/>
-            <pc:sldMk cId="1096996333" sldId="342"/>
-            <ac:picMk id="3074" creationId="{0E3DA4C8-9AD0-3736-DDD3-8BDD15E1FB8A}"/>
-          </ac:picMkLst>
-        </pc:picChg>
-        <pc:picChg chg="add mod">
-          <ac:chgData name="JHEYSON FABIAN VILLAVISAN BUITRAGO" userId="e5ced5c2-d787-455d-b115-4f08a699b8c8" providerId="ADAL" clId="{346ECE53-D0EE-4664-97A2-EE5ED4BD15CE}" dt="2025-10-01T15:16:18.058" v="9477" actId="1076"/>
-          <ac:picMkLst>
-            <pc:docMk/>
-            <pc:sldMk cId="1096996333" sldId="342"/>
-            <ac:picMk id="4098" creationId="{79299B1D-02D8-1049-1B8B-C7DC3B40D034}"/>
-          </ac:picMkLst>
-        </pc:picChg>
       </pc:sldChg>
       <pc:sldChg chg="addSp delSp modSp add mod ord">
         <pc:chgData name="JHEYSON FABIAN VILLAVISAN BUITRAGO" userId="e5ced5c2-d787-455d-b115-4f08a699b8c8" providerId="ADAL" clId="{346ECE53-D0EE-4664-97A2-EE5ED4BD15CE}" dt="2025-10-01T15:24:59.825" v="9585" actId="1076"/>
@@ -2382,46 +1701,6 @@
           <pc:docMk/>
           <pc:sldMk cId="2348889441" sldId="343"/>
         </pc:sldMkLst>
-        <pc:spChg chg="add del mod">
-          <ac:chgData name="JHEYSON FABIAN VILLAVISAN BUITRAGO" userId="e5ced5c2-d787-455d-b115-4f08a699b8c8" providerId="ADAL" clId="{346ECE53-D0EE-4664-97A2-EE5ED4BD15CE}" dt="2025-10-01T15:23:46.060" v="9575" actId="1076"/>
-          <ac:spMkLst>
-            <pc:docMk/>
-            <pc:sldMk cId="2348889441" sldId="343"/>
-            <ac:spMk id="4" creationId="{FE455CB8-90D2-6B9E-FFF1-20F7FDF6CAD5}"/>
-          </ac:spMkLst>
-        </pc:spChg>
-        <pc:spChg chg="add mod">
-          <ac:chgData name="JHEYSON FABIAN VILLAVISAN BUITRAGO" userId="e5ced5c2-d787-455d-b115-4f08a699b8c8" providerId="ADAL" clId="{346ECE53-D0EE-4664-97A2-EE5ED4BD15CE}" dt="2025-10-01T15:24:59.825" v="9585" actId="1076"/>
-          <ac:spMkLst>
-            <pc:docMk/>
-            <pc:sldMk cId="2348889441" sldId="343"/>
-            <ac:spMk id="9" creationId="{3A86AB69-362F-4601-CD9E-27E4E82F4DE0}"/>
-          </ac:spMkLst>
-        </pc:spChg>
-        <pc:spChg chg="mod">
-          <ac:chgData name="JHEYSON FABIAN VILLAVISAN BUITRAGO" userId="e5ced5c2-d787-455d-b115-4f08a699b8c8" providerId="ADAL" clId="{346ECE53-D0EE-4664-97A2-EE5ED4BD15CE}" dt="2025-10-01T15:22:23.982" v="9562" actId="20577"/>
-          <ac:spMkLst>
-            <pc:docMk/>
-            <pc:sldMk cId="2348889441" sldId="343"/>
-            <ac:spMk id="10" creationId="{6AEA950D-DCF6-7247-EDC3-94D57E436F03}"/>
-          </ac:spMkLst>
-        </pc:spChg>
-        <pc:picChg chg="add mod">
-          <ac:chgData name="JHEYSON FABIAN VILLAVISAN BUITRAGO" userId="e5ced5c2-d787-455d-b115-4f08a699b8c8" providerId="ADAL" clId="{346ECE53-D0EE-4664-97A2-EE5ED4BD15CE}" dt="2025-10-01T15:23:52.551" v="9577" actId="1076"/>
-          <ac:picMkLst>
-            <pc:docMk/>
-            <pc:sldMk cId="2348889441" sldId="343"/>
-            <ac:picMk id="6" creationId="{1180AE4D-8A67-8FB4-A3C5-AFED5F908123}"/>
-          </ac:picMkLst>
-        </pc:picChg>
-        <pc:picChg chg="add mod">
-          <ac:chgData name="JHEYSON FABIAN VILLAVISAN BUITRAGO" userId="e5ced5c2-d787-455d-b115-4f08a699b8c8" providerId="ADAL" clId="{346ECE53-D0EE-4664-97A2-EE5ED4BD15CE}" dt="2025-10-01T15:24:35.049" v="9579" actId="1076"/>
-          <ac:picMkLst>
-            <pc:docMk/>
-            <pc:sldMk cId="2348889441" sldId="343"/>
-            <ac:picMk id="8" creationId="{D521794C-74DE-BA28-9481-BA04D382D7B1}"/>
-          </ac:picMkLst>
-        </pc:picChg>
       </pc:sldChg>
       <pc:sldChg chg="addSp delSp modSp add mod">
         <pc:chgData name="JHEYSON FABIAN VILLAVISAN BUITRAGO" userId="e5ced5c2-d787-455d-b115-4f08a699b8c8" providerId="ADAL" clId="{346ECE53-D0EE-4664-97A2-EE5ED4BD15CE}" dt="2025-10-01T15:40:40.573" v="9970" actId="403"/>
@@ -2429,70 +1708,6 @@
           <pc:docMk/>
           <pc:sldMk cId="412528506" sldId="344"/>
         </pc:sldMkLst>
-        <pc:spChg chg="del">
-          <ac:chgData name="JHEYSON FABIAN VILLAVISAN BUITRAGO" userId="e5ced5c2-d787-455d-b115-4f08a699b8c8" providerId="ADAL" clId="{346ECE53-D0EE-4664-97A2-EE5ED4BD15CE}" dt="2025-10-01T15:28:21.009" v="9593" actId="478"/>
-          <ac:spMkLst>
-            <pc:docMk/>
-            <pc:sldMk cId="412528506" sldId="344"/>
-            <ac:spMk id="2" creationId="{BBBDF6F9-C1BC-F61E-05B9-E72F3E9E220B}"/>
-          </ac:spMkLst>
-        </pc:spChg>
-        <pc:spChg chg="del">
-          <ac:chgData name="JHEYSON FABIAN VILLAVISAN BUITRAGO" userId="e5ced5c2-d787-455d-b115-4f08a699b8c8" providerId="ADAL" clId="{346ECE53-D0EE-4664-97A2-EE5ED4BD15CE}" dt="2025-10-01T15:28:27.320" v="9595" actId="478"/>
-          <ac:spMkLst>
-            <pc:docMk/>
-            <pc:sldMk cId="412528506" sldId="344"/>
-            <ac:spMk id="4" creationId="{5745C02C-5467-8924-F6BD-ACB015AD5713}"/>
-          </ac:spMkLst>
-        </pc:spChg>
-        <pc:spChg chg="add del mod">
-          <ac:chgData name="JHEYSON FABIAN VILLAVISAN BUITRAGO" userId="e5ced5c2-d787-455d-b115-4f08a699b8c8" providerId="ADAL" clId="{346ECE53-D0EE-4664-97A2-EE5ED4BD15CE}" dt="2025-10-01T15:28:24.493" v="9594" actId="478"/>
-          <ac:spMkLst>
-            <pc:docMk/>
-            <pc:sldMk cId="412528506" sldId="344"/>
-            <ac:spMk id="7" creationId="{ACE71D9A-D10C-841B-A618-D13D5759450D}"/>
-          </ac:spMkLst>
-        </pc:spChg>
-        <pc:spChg chg="mod">
-          <ac:chgData name="JHEYSON FABIAN VILLAVISAN BUITRAGO" userId="e5ced5c2-d787-455d-b115-4f08a699b8c8" providerId="ADAL" clId="{346ECE53-D0EE-4664-97A2-EE5ED4BD15CE}" dt="2025-10-01T15:40:40.573" v="9970" actId="403"/>
-          <ac:spMkLst>
-            <pc:docMk/>
-            <pc:sldMk cId="412528506" sldId="344"/>
-            <ac:spMk id="9" creationId="{75CF37AF-5E63-E378-D54B-3B2547699C12}"/>
-          </ac:spMkLst>
-        </pc:spChg>
-        <pc:spChg chg="add mod">
-          <ac:chgData name="JHEYSON FABIAN VILLAVISAN BUITRAGO" userId="e5ced5c2-d787-455d-b115-4f08a699b8c8" providerId="ADAL" clId="{346ECE53-D0EE-4664-97A2-EE5ED4BD15CE}" dt="2025-10-01T15:37:41.528" v="9942" actId="20577"/>
-          <ac:spMkLst>
-            <pc:docMk/>
-            <pc:sldMk cId="412528506" sldId="344"/>
-            <ac:spMk id="13" creationId="{3EED6585-7A0A-4DCD-9091-9FB99301A51B}"/>
-          </ac:spMkLst>
-        </pc:spChg>
-        <pc:picChg chg="del">
-          <ac:chgData name="JHEYSON FABIAN VILLAVISAN BUITRAGO" userId="e5ced5c2-d787-455d-b115-4f08a699b8c8" providerId="ADAL" clId="{346ECE53-D0EE-4664-97A2-EE5ED4BD15CE}" dt="2025-10-01T15:28:27.320" v="9595" actId="478"/>
-          <ac:picMkLst>
-            <pc:docMk/>
-            <pc:sldMk cId="412528506" sldId="344"/>
-            <ac:picMk id="6" creationId="{96407160-18E7-E598-5A58-6FC6A60E8CC9}"/>
-          </ac:picMkLst>
-        </pc:picChg>
-        <pc:picChg chg="del">
-          <ac:chgData name="JHEYSON FABIAN VILLAVISAN BUITRAGO" userId="e5ced5c2-d787-455d-b115-4f08a699b8c8" providerId="ADAL" clId="{346ECE53-D0EE-4664-97A2-EE5ED4BD15CE}" dt="2025-10-01T15:28:27.320" v="9595" actId="478"/>
-          <ac:picMkLst>
-            <pc:docMk/>
-            <pc:sldMk cId="412528506" sldId="344"/>
-            <ac:picMk id="8" creationId="{58F7B5D3-7AE3-C421-555D-170CB59C5AF4}"/>
-          </ac:picMkLst>
-        </pc:picChg>
-        <pc:picChg chg="add mod">
-          <ac:chgData name="JHEYSON FABIAN VILLAVISAN BUITRAGO" userId="e5ced5c2-d787-455d-b115-4f08a699b8c8" providerId="ADAL" clId="{346ECE53-D0EE-4664-97A2-EE5ED4BD15CE}" dt="2025-10-01T15:37:11.051" v="9883" actId="1076"/>
-          <ac:picMkLst>
-            <pc:docMk/>
-            <pc:sldMk cId="412528506" sldId="344"/>
-            <ac:picMk id="12" creationId="{D8C79FAA-719E-250E-3354-760A0A999D41}"/>
-          </ac:picMkLst>
-        </pc:picChg>
       </pc:sldChg>
       <pc:sldChg chg="delSp modSp add mod ord">
         <pc:chgData name="JHEYSON FABIAN VILLAVISAN BUITRAGO" userId="e5ced5c2-d787-455d-b115-4f08a699b8c8" providerId="ADAL" clId="{346ECE53-D0EE-4664-97A2-EE5ED4BD15CE}" dt="2025-10-01T15:41:55.251" v="9978" actId="20577"/>
@@ -2500,38 +1715,6 @@
           <pc:docMk/>
           <pc:sldMk cId="3286888530" sldId="345"/>
         </pc:sldMkLst>
-        <pc:spChg chg="mod">
-          <ac:chgData name="JHEYSON FABIAN VILLAVISAN BUITRAGO" userId="e5ced5c2-d787-455d-b115-4f08a699b8c8" providerId="ADAL" clId="{346ECE53-D0EE-4664-97A2-EE5ED4BD15CE}" dt="2025-10-01T15:39:21.544" v="9958" actId="20577"/>
-          <ac:spMkLst>
-            <pc:docMk/>
-            <pc:sldMk cId="3286888530" sldId="345"/>
-            <ac:spMk id="2" creationId="{C65684B7-65C3-63FC-66FD-D50054162A1F}"/>
-          </ac:spMkLst>
-        </pc:spChg>
-        <pc:spChg chg="mod">
-          <ac:chgData name="JHEYSON FABIAN VILLAVISAN BUITRAGO" userId="e5ced5c2-d787-455d-b115-4f08a699b8c8" providerId="ADAL" clId="{346ECE53-D0EE-4664-97A2-EE5ED4BD15CE}" dt="2025-10-01T15:41:50.483" v="9976" actId="113"/>
-          <ac:spMkLst>
-            <pc:docMk/>
-            <pc:sldMk cId="3286888530" sldId="345"/>
-            <ac:spMk id="3" creationId="{92225F00-5658-F975-C02E-89B596220CA8}"/>
-          </ac:spMkLst>
-        </pc:spChg>
-        <pc:spChg chg="mod">
-          <ac:chgData name="JHEYSON FABIAN VILLAVISAN BUITRAGO" userId="e5ced5c2-d787-455d-b115-4f08a699b8c8" providerId="ADAL" clId="{346ECE53-D0EE-4664-97A2-EE5ED4BD15CE}" dt="2025-10-01T15:41:55.251" v="9978" actId="20577"/>
-          <ac:spMkLst>
-            <pc:docMk/>
-            <pc:sldMk cId="3286888530" sldId="345"/>
-            <ac:spMk id="10" creationId="{487B9FC8-5BA5-D437-51F4-70648E7FFA64}"/>
-          </ac:spMkLst>
-        </pc:spChg>
-        <pc:picChg chg="del">
-          <ac:chgData name="JHEYSON FABIAN VILLAVISAN BUITRAGO" userId="e5ced5c2-d787-455d-b115-4f08a699b8c8" providerId="ADAL" clId="{346ECE53-D0EE-4664-97A2-EE5ED4BD15CE}" dt="2025-10-01T15:41:01.799" v="9971" actId="478"/>
-          <ac:picMkLst>
-            <pc:docMk/>
-            <pc:sldMk cId="3286888530" sldId="345"/>
-            <ac:picMk id="7" creationId="{14577AE2-1023-E53D-6390-BD5E2645DD4E}"/>
-          </ac:picMkLst>
-        </pc:picChg>
       </pc:sldChg>
       <pc:sldChg chg="addSp delSp modSp add mod ord">
         <pc:chgData name="JHEYSON FABIAN VILLAVISAN BUITRAGO" userId="e5ced5c2-d787-455d-b115-4f08a699b8c8" providerId="ADAL" clId="{346ECE53-D0EE-4664-97A2-EE5ED4BD15CE}" dt="2025-10-01T15:58:27.948" v="10410" actId="20577"/>
@@ -2539,46 +1722,6 @@
           <pc:docMk/>
           <pc:sldMk cId="4103977538" sldId="346"/>
         </pc:sldMkLst>
-        <pc:spChg chg="mod">
-          <ac:chgData name="JHEYSON FABIAN VILLAVISAN BUITRAGO" userId="e5ced5c2-d787-455d-b115-4f08a699b8c8" providerId="ADAL" clId="{346ECE53-D0EE-4664-97A2-EE5ED4BD15CE}" dt="2025-10-01T15:53:16.808" v="10028" actId="1076"/>
-          <ac:spMkLst>
-            <pc:docMk/>
-            <pc:sldMk cId="4103977538" sldId="346"/>
-            <ac:spMk id="2" creationId="{2734E12D-3390-89C5-1D13-3D7EE1309426}"/>
-          </ac:spMkLst>
-        </pc:spChg>
-        <pc:spChg chg="del">
-          <ac:chgData name="JHEYSON FABIAN VILLAVISAN BUITRAGO" userId="e5ced5c2-d787-455d-b115-4f08a699b8c8" providerId="ADAL" clId="{346ECE53-D0EE-4664-97A2-EE5ED4BD15CE}" dt="2025-10-01T15:48:40.977" v="9989" actId="478"/>
-          <ac:spMkLst>
-            <pc:docMk/>
-            <pc:sldMk cId="4103977538" sldId="346"/>
-            <ac:spMk id="3" creationId="{038E99F7-B717-D197-066B-0B7693F64CAD}"/>
-          </ac:spMkLst>
-        </pc:spChg>
-        <pc:spChg chg="add mod">
-          <ac:chgData name="JHEYSON FABIAN VILLAVISAN BUITRAGO" userId="e5ced5c2-d787-455d-b115-4f08a699b8c8" providerId="ADAL" clId="{346ECE53-D0EE-4664-97A2-EE5ED4BD15CE}" dt="2025-10-01T15:58:27.948" v="10410" actId="20577"/>
-          <ac:spMkLst>
-            <pc:docMk/>
-            <pc:sldMk cId="4103977538" sldId="346"/>
-            <ac:spMk id="6" creationId="{EBC33719-E875-A6FA-3BAE-0B0C2AA1E62F}"/>
-          </ac:spMkLst>
-        </pc:spChg>
-        <pc:spChg chg="mod">
-          <ac:chgData name="JHEYSON FABIAN VILLAVISAN BUITRAGO" userId="e5ced5c2-d787-455d-b115-4f08a699b8c8" providerId="ADAL" clId="{346ECE53-D0EE-4664-97A2-EE5ED4BD15CE}" dt="2025-10-01T15:49:12.915" v="10004" actId="20577"/>
-          <ac:spMkLst>
-            <pc:docMk/>
-            <pc:sldMk cId="4103977538" sldId="346"/>
-            <ac:spMk id="10" creationId="{5FB5E73B-DB1D-E3F5-C6BF-30F940B4566F}"/>
-          </ac:spMkLst>
-        </pc:spChg>
-        <pc:graphicFrameChg chg="add mod modGraphic">
-          <ac:chgData name="JHEYSON FABIAN VILLAVISAN BUITRAGO" userId="e5ced5c2-d787-455d-b115-4f08a699b8c8" providerId="ADAL" clId="{346ECE53-D0EE-4664-97A2-EE5ED4BD15CE}" dt="2025-10-01T15:48:59.893" v="10002" actId="1076"/>
-          <ac:graphicFrameMkLst>
-            <pc:docMk/>
-            <pc:sldMk cId="4103977538" sldId="346"/>
-            <ac:graphicFrameMk id="4" creationId="{1C328AAA-1C5C-099E-5874-19F006D099A2}"/>
-          </ac:graphicFrameMkLst>
-        </pc:graphicFrameChg>
       </pc:sldChg>
     </pc:docChg>
   </pc:docChgLst>
@@ -3318,7 +2461,7 @@
               <a:pPr>
                 <a:defRPr/>
               </a:pPr>
-              <a:t>1/10/25</a:t>
+              <a:t>1/11/25</a:t>
             </a:fld>
             <a:endParaRPr lang="es-CO"/>
           </a:p>
@@ -3561,7 +2704,7 @@
               <a:pPr>
                 <a:defRPr/>
               </a:pPr>
-              <a:t>1/10/25</a:t>
+              <a:t>1/11/25</a:t>
             </a:fld>
             <a:endParaRPr lang="es-CO"/>
           </a:p>
@@ -8171,7 +7314,7 @@
           <a:p>
             <a:fld id="{9CF7635E-2D71-42E7-9E6C-FBB85A15A85F}" type="datetimeFigureOut">
               <a:rPr lang="es-CO" smtClean="0"/>
-              <a:t>1/10/25</a:t>
+              <a:t>1/11/25</a:t>
             </a:fld>
             <a:endParaRPr lang="es-CO"/>
           </a:p>
@@ -8437,7 +7580,7 @@
           <a:p>
             <a:fld id="{9CF7635E-2D71-42E7-9E6C-FBB85A15A85F}" type="datetimeFigureOut">
               <a:rPr lang="es-CO" smtClean="0"/>
-              <a:t>1/10/25</a:t>
+              <a:t>1/11/25</a:t>
             </a:fld>
             <a:endParaRPr lang="es-CO"/>
           </a:p>
@@ -8653,7 +7796,7 @@
           <a:p>
             <a:fld id="{9CF7635E-2D71-42E7-9E6C-FBB85A15A85F}" type="datetimeFigureOut">
               <a:rPr lang="es-CO" smtClean="0"/>
-              <a:t>1/10/25</a:t>
+              <a:t>1/11/25</a:t>
             </a:fld>
             <a:endParaRPr lang="es-CO"/>
           </a:p>
@@ -10282,7 +9425,7 @@
           <a:p>
             <a:fld id="{9CF7635E-2D71-42E7-9E6C-FBB85A15A85F}" type="datetimeFigureOut">
               <a:rPr lang="es-CO" smtClean="0"/>
-              <a:t>1/10/25</a:t>
+              <a:t>1/11/25</a:t>
             </a:fld>
             <a:endParaRPr lang="es-CO"/>
           </a:p>
@@ -10729,7 +9872,7 @@
           <a:p>
             <a:fld id="{9CF7635E-2D71-42E7-9E6C-FBB85A15A85F}" type="datetimeFigureOut">
               <a:rPr lang="es-CO" smtClean="0"/>
-              <a:t>1/10/25</a:t>
+              <a:t>1/11/25</a:t>
             </a:fld>
             <a:endParaRPr lang="es-CO"/>
           </a:p>
@@ -11003,7 +10146,7 @@
           <a:p>
             <a:fld id="{9CF7635E-2D71-42E7-9E6C-FBB85A15A85F}" type="datetimeFigureOut">
               <a:rPr lang="es-CO" smtClean="0"/>
-              <a:t>1/10/25</a:t>
+              <a:t>1/11/25</a:t>
             </a:fld>
             <a:endParaRPr lang="es-CO"/>
           </a:p>
@@ -11424,7 +10567,7 @@
           <a:p>
             <a:fld id="{9CF7635E-2D71-42E7-9E6C-FBB85A15A85F}" type="datetimeFigureOut">
               <a:rPr lang="es-CO" smtClean="0"/>
-              <a:t>1/10/25</a:t>
+              <a:t>1/11/25</a:t>
             </a:fld>
             <a:endParaRPr lang="es-CO"/>
           </a:p>
@@ -11572,7 +10715,7 @@
           <a:p>
             <a:fld id="{9CF7635E-2D71-42E7-9E6C-FBB85A15A85F}" type="datetimeFigureOut">
               <a:rPr lang="es-CO" smtClean="0"/>
-              <a:t>1/10/25</a:t>
+              <a:t>1/11/25</a:t>
             </a:fld>
             <a:endParaRPr lang="es-CO"/>
           </a:p>
@@ -11691,7 +10834,7 @@
           <a:p>
             <a:fld id="{9CF7635E-2D71-42E7-9E6C-FBB85A15A85F}" type="datetimeFigureOut">
               <a:rPr lang="es-CO" smtClean="0"/>
-              <a:t>1/10/25</a:t>
+              <a:t>1/11/25</a:t>
             </a:fld>
             <a:endParaRPr lang="es-CO"/>
           </a:p>
@@ -12010,7 +11153,7 @@
           <a:p>
             <a:fld id="{9CF7635E-2D71-42E7-9E6C-FBB85A15A85F}" type="datetimeFigureOut">
               <a:rPr lang="es-CO" smtClean="0"/>
-              <a:t>1/10/25</a:t>
+              <a:t>1/11/25</a:t>
             </a:fld>
             <a:endParaRPr lang="es-CO"/>
           </a:p>
@@ -12305,7 +11448,7 @@
           <a:p>
             <a:fld id="{9CF7635E-2D71-42E7-9E6C-FBB85A15A85F}" type="datetimeFigureOut">
               <a:rPr lang="es-CO" smtClean="0"/>
-              <a:t>1/10/25</a:t>
+              <a:t>1/11/25</a:t>
             </a:fld>
             <a:endParaRPr lang="es-CO"/>
           </a:p>
@@ -12554,7 +11697,7 @@
           <a:p>
             <a:fld id="{9CF7635E-2D71-42E7-9E6C-FBB85A15A85F}" type="datetimeFigureOut">
               <a:rPr lang="es-CO" smtClean="0"/>
-              <a:t>1/10/25</a:t>
+              <a:t>1/11/25</a:t>
             </a:fld>
             <a:endParaRPr lang="es-CO"/>
           </a:p>
@@ -36662,7 +35805,23 @@
           <a:p>
             <a:r>
               <a:rPr lang="es-ES" dirty="0"/>
-              <a:t>Diseñe usando un Arduino un acondicionador de señales que amplifique la señal de entrada de un potenciómetro  y filtre digitalmente las señales superiores a 5Hz, usando una tasa de muestreo de 100 muestras por segundo o 1kHz. El orden del filtro debe ser de 10 o superior.</a:t>
+              <a:t>Diseñe usando un Arduino un acondicionador de señales que amplifique la señal de entrada de un potenciómetro  y filtre digitalmente las señales superiores a 5Hz, usando una tasa de muestreo </a:t>
+            </a:r>
+            <a:r>
+              <a:rPr lang="es-ES"/>
+              <a:t>de 100 </a:t>
+            </a:r>
+            <a:r>
+              <a:rPr lang="es-ES" dirty="0"/>
+              <a:t>muestras </a:t>
+            </a:r>
+            <a:r>
+              <a:rPr lang="es-ES"/>
+              <a:t>por segundo. </a:t>
+            </a:r>
+            <a:r>
+              <a:rPr lang="es-ES" dirty="0"/>
+              <a:t>El orden del filtro debe ser de 10 o superior.</a:t>
             </a:r>
             <a:endParaRPr lang="es-CO" b="1" dirty="0"/>
           </a:p>
@@ -46123,14 +45282,6 @@
 </file>
 
 <file path=customXml/item1.xml><?xml version="1.0" encoding="utf-8"?>
-<p:properties xmlns:p="http://schemas.microsoft.com/office/2006/metadata/properties" xmlns:xsi="http://www.w3.org/2001/XMLSchema-instance" xmlns:pc="http://schemas.microsoft.com/office/infopath/2007/PartnerControls">
-  <documentManagement>
-    <_activity xmlns="bdc56f61-abc0-4f7e-bfec-a93ccd1ae886" xsi:nil="true"/>
-  </documentManagement>
-</p:properties>
-</file>
-
-<file path=customXml/item2.xml><?xml version="1.0" encoding="utf-8"?>
 <?mso-contentType ?>
 <FormTemplates xmlns="http://schemas.microsoft.com/sharepoint/v3/contenttype/forms">
   <Display>DocumentLibraryForm</Display>
@@ -46139,7 +45290,7 @@
 </FormTemplates>
 </file>
 
-<file path=customXml/item3.xml><?xml version="1.0" encoding="utf-8"?>
+<file path=customXml/item2.xml><?xml version="1.0" encoding="utf-8"?>
 <ct:contentTypeSchema xmlns:ct="http://schemas.microsoft.com/office/2006/metadata/contentType" xmlns:ma="http://schemas.microsoft.com/office/2006/metadata/properties/metaAttributes" ct:_="" ma:_="" ma:contentTypeName="Documento" ma:contentTypeID="0x0101007A62137D465CE64A8C883A4664514BF8" ma:contentTypeVersion="15" ma:contentTypeDescription="Crear nuevo documento." ma:contentTypeScope="" ma:versionID="a1bd1d59f691eb9bca6952b111268275">
   <xsd:schema xmlns:xsd="http://www.w3.org/2001/XMLSchema" xmlns:xs="http://www.w3.org/2001/XMLSchema" xmlns:p="http://schemas.microsoft.com/office/2006/metadata/properties" xmlns:ns3="669280c1-d17e-4d1d-bd7f-b4f14cc6bf1d" xmlns:ns4="bdc56f61-abc0-4f7e-bfec-a93ccd1ae886" targetNamespace="http://schemas.microsoft.com/office/2006/metadata/properties" ma:root="true" ma:fieldsID="d02990a02f19f0f9fc7b999b1809cae4" ns3:_="" ns4:_="">
     <xsd:import namespace="669280c1-d17e-4d1d-bd7f-b4f14cc6bf1d"/>
@@ -46374,24 +45525,15 @@
 </ct:contentTypeSchema>
 </file>
 
-<file path=customXml/itemProps1.xml><?xml version="1.0" encoding="utf-8"?>
-<ds:datastoreItem xmlns:ds="http://schemas.openxmlformats.org/officeDocument/2006/customXml" ds:itemID="{0825853C-1B27-4995-A583-4D39F900BB7F}">
-  <ds:schemaRefs>
-    <ds:schemaRef ds:uri="http://schemas.microsoft.com/office/infopath/2007/PartnerControls"/>
-    <ds:schemaRef ds:uri="http://schemas.openxmlformats.org/package/2006/metadata/core-properties"/>
-    <ds:schemaRef ds:uri="http://schemas.microsoft.com/office/2006/documentManagement/types"/>
-    <ds:schemaRef ds:uri="http://purl.org/dc/dcmitype/"/>
-    <ds:schemaRef ds:uri="bdc56f61-abc0-4f7e-bfec-a93ccd1ae886"/>
-    <ds:schemaRef ds:uri="http://purl.org/dc/terms/"/>
-    <ds:schemaRef ds:uri="http://purl.org/dc/elements/1.1/"/>
-    <ds:schemaRef ds:uri="669280c1-d17e-4d1d-bd7f-b4f14cc6bf1d"/>
-    <ds:schemaRef ds:uri="http://schemas.microsoft.com/office/2006/metadata/properties"/>
-    <ds:schemaRef ds:uri="http://www.w3.org/XML/1998/namespace"/>
-  </ds:schemaRefs>
-</ds:datastoreItem>
+<file path=customXml/item3.xml><?xml version="1.0" encoding="utf-8"?>
+<p:properties xmlns:p="http://schemas.microsoft.com/office/2006/metadata/properties" xmlns:xsi="http://www.w3.org/2001/XMLSchema-instance" xmlns:pc="http://schemas.microsoft.com/office/infopath/2007/PartnerControls">
+  <documentManagement>
+    <_activity xmlns="bdc56f61-abc0-4f7e-bfec-a93ccd1ae886" xsi:nil="true"/>
+  </documentManagement>
+</p:properties>
 </file>
 
-<file path=customXml/itemProps2.xml><?xml version="1.0" encoding="utf-8"?>
+<file path=customXml/itemProps1.xml><?xml version="1.0" encoding="utf-8"?>
 <ds:datastoreItem xmlns:ds="http://schemas.openxmlformats.org/officeDocument/2006/customXml" ds:itemID="{4E8623C8-32E1-48B0-9F0A-13F2E9582B7E}">
   <ds:schemaRefs>
     <ds:schemaRef ds:uri="http://schemas.microsoft.com/sharepoint/v3/contenttype/forms"/>
@@ -46399,7 +45541,7 @@
 </ds:datastoreItem>
 </file>
 
-<file path=customXml/itemProps3.xml><?xml version="1.0" encoding="utf-8"?>
+<file path=customXml/itemProps2.xml><?xml version="1.0" encoding="utf-8"?>
 <ds:datastoreItem xmlns:ds="http://schemas.openxmlformats.org/officeDocument/2006/customXml" ds:itemID="{025820C3-FD82-4EFC-BF14-EAF1F9613F52}">
   <ds:schemaRefs>
     <ds:schemaRef ds:uri="669280c1-d17e-4d1d-bd7f-b4f14cc6bf1d"/>
@@ -46416,4 +45558,21 @@
     <ds:schemaRef ds:uri="http://www.w3.org/2001/XMLSchema"/>
   </ds:schemaRefs>
 </ds:datastoreItem>
+</file>
+
+<file path=customXml/itemProps3.xml><?xml version="1.0" encoding="utf-8"?>
+<ds:datastoreItem xmlns:ds="http://schemas.openxmlformats.org/officeDocument/2006/customXml" ds:itemID="{0825853C-1B27-4995-A583-4D39F900BB7F}">
+  <ds:schemaRefs>
+    <ds:schemaRef ds:uri="http://purl.org/dc/dcmitype/"/>
+    <ds:schemaRef ds:uri="http://schemas.openxmlformats.org/package/2006/metadata/core-properties"/>
+    <ds:schemaRef ds:uri="http://purl.org/dc/terms/"/>
+    <ds:schemaRef ds:uri="669280c1-d17e-4d1d-bd7f-b4f14cc6bf1d"/>
+    <ds:schemaRef ds:uri="http://schemas.microsoft.com/office/2006/documentManagement/types"/>
+    <ds:schemaRef ds:uri="bdc56f61-abc0-4f7e-bfec-a93ccd1ae886"/>
+    <ds:schemaRef ds:uri="http://www.w3.org/XML/1998/namespace"/>
+    <ds:schemaRef ds:uri="http://schemas.microsoft.com/office/infopath/2007/PartnerControls"/>
+    <ds:schemaRef ds:uri="http://schemas.microsoft.com/office/2006/metadata/properties"/>
+    <ds:schemaRef ds:uri="http://purl.org/dc/elements/1.1/"/>
+  </ds:schemaRefs>
+</ds:datastoreItem>
 </file>